--- a/Bases de Datos II/Clases/Clase 11 - Avance del proyecto final/Presentacion.pptx
+++ b/Bases de Datos II/Clases/Clase 11 - Avance del proyecto final/Presentacion.pptx
@@ -19,8 +19,6 @@
     <p:sldId id="267" r:id="rId18"/>
     <p:sldId id="268" r:id="rId19"/>
     <p:sldId id="269" r:id="rId20"/>
-    <p:sldId id="270" r:id="rId21"/>
-    <p:sldId id="271" r:id="rId22"/>
   </p:sldIdLst>
   <p:sldSz cx="12191695" cy="6858000" type="screen4x3"/>
   <p:notesSz cx="6858000" cy="9144000"/>
@@ -5891,1017 +5889,6 @@
         <p:spPr>
           <a:xfrm>
             <a:off x="0" y="0"/>
-            <a:ext cx="12191695" cy="1170432"/>
-          </a:xfrm>
-          <a:prstGeom prst="rect">
-            <a:avLst/>
-          </a:prstGeom>
-          <a:solidFill>
-            <a:srgbClr val="095292"/>
-          </a:solidFill>
-          <a:ln>
-            <a:noFill/>
-          </a:ln>
-        </p:spPr>
-        <p:style>
-          <a:lnRef idx="1">
-            <a:schemeClr val="accent1"/>
-          </a:lnRef>
-          <a:fillRef idx="3">
-            <a:schemeClr val="accent1"/>
-          </a:fillRef>
-          <a:effectRef idx="2">
-            <a:schemeClr val="accent1"/>
-          </a:effectRef>
-          <a:fontRef idx="minor">
-            <a:schemeClr val="lt1"/>
-          </a:fontRef>
-        </p:style>
-        <p:txBody>
-          <a:bodyPr rtlCol="0" anchor="ctr"/>
-          <a:lstStyle/>
-          <a:p>
-            <a:pPr algn="ctr"/>
-          </a:p>
-        </p:txBody>
-      </p:sp>
-      <p:sp>
-        <p:nvSpPr>
-          <p:cNvPr id="3" name="Rectangle 2"/>
-          <p:cNvSpPr/>
-          <p:nvPr/>
-        </p:nvSpPr>
-        <p:spPr>
-          <a:xfrm>
-            <a:off x="0" y="1170432"/>
-            <a:ext cx="12191695" cy="41148"/>
-          </a:xfrm>
-          <a:prstGeom prst="rect">
-            <a:avLst/>
-          </a:prstGeom>
-          <a:solidFill>
-            <a:srgbClr val="FFD000"/>
-          </a:solidFill>
-          <a:ln>
-            <a:noFill/>
-          </a:ln>
-        </p:spPr>
-        <p:style>
-          <a:lnRef idx="1">
-            <a:schemeClr val="accent1"/>
-          </a:lnRef>
-          <a:fillRef idx="3">
-            <a:schemeClr val="accent1"/>
-          </a:fillRef>
-          <a:effectRef idx="2">
-            <a:schemeClr val="accent1"/>
-          </a:effectRef>
-          <a:fontRef idx="minor">
-            <a:schemeClr val="lt1"/>
-          </a:fontRef>
-        </p:style>
-        <p:txBody>
-          <a:bodyPr rtlCol="0" anchor="ctr"/>
-          <a:lstStyle/>
-          <a:p>
-            <a:pPr algn="ctr"/>
-          </a:p>
-        </p:txBody>
-      </p:sp>
-      <p:sp>
-        <p:nvSpPr>
-          <p:cNvPr id="4" name="TextBox 3"/>
-          <p:cNvSpPr txBox="1"/>
-          <p:nvPr/>
-        </p:nvSpPr>
-        <p:spPr>
-          <a:xfrm>
-            <a:off x="457200" y="164592"/>
-            <a:ext cx="11277295" cy="384048"/>
-          </a:xfrm>
-          <a:prstGeom prst="rect">
-            <a:avLst/>
-          </a:prstGeom>
-          <a:noFill/>
-        </p:spPr>
-        <p:txBody>
-          <a:bodyPr wrap="square">
-            <a:spAutoFit/>
-          </a:bodyPr>
-          <a:lstStyle/>
-          <a:p>
-            <a:r>
-              <a:rPr sz="2600" b="1" i="0">
-                <a:solidFill>
-                  <a:srgbClr val="FFFFFF"/>
-                </a:solidFill>
-                <a:latin typeface="Calibri"/>
-              </a:rPr>
-              <a:t>Quiz rapido (cierre)</a:t>
-            </a:r>
-          </a:p>
-        </p:txBody>
-      </p:sp>
-      <p:sp>
-        <p:nvSpPr>
-          <p:cNvPr id="5" name="TextBox 4"/>
-          <p:cNvSpPr txBox="1"/>
-          <p:nvPr/>
-        </p:nvSpPr>
-        <p:spPr>
-          <a:xfrm>
-            <a:off x="457200" y="566928"/>
-            <a:ext cx="11277295" cy="411480"/>
-          </a:xfrm>
-          <a:prstGeom prst="rect">
-            <a:avLst/>
-          </a:prstGeom>
-          <a:noFill/>
-        </p:spPr>
-        <p:txBody>
-          <a:bodyPr wrap="square">
-            <a:spAutoFit/>
-          </a:bodyPr>
-          <a:lstStyle/>
-          <a:p>
-            <a:r>
-              <a:rPr sz="1400" b="0" i="0">
-                <a:solidFill>
-                  <a:srgbClr val="B8D8EE"/>
-                </a:solidFill>
-                <a:latin typeface="Calibri"/>
-              </a:rPr>
-              <a:t>Individual · 8–10 min</a:t>
-            </a:r>
-          </a:p>
-        </p:txBody>
-      </p:sp>
-      <p:sp>
-        <p:nvSpPr>
-          <p:cNvPr id="6" name="TextBox 5"/>
-          <p:cNvSpPr txBox="1"/>
-          <p:nvPr/>
-        </p:nvSpPr>
-        <p:spPr>
-          <a:xfrm>
-            <a:off x="457200" y="1380744"/>
-            <a:ext cx="11277295" cy="5020056"/>
-          </a:xfrm>
-          <a:prstGeom prst="rect">
-            <a:avLst/>
-          </a:prstGeom>
-          <a:noFill/>
-        </p:spPr>
-        <p:txBody>
-          <a:bodyPr wrap="square">
-            <a:spAutoFit/>
-          </a:bodyPr>
-          <a:lstStyle/>
-          <a:p>
-            <a:pPr>
-              <a:spcAft>
-                <a:spcPts val="800"/>
-              </a:spcAft>
-            </a:pPr>
-            <a:r>
-              <a:rPr sz="1200" b="1" i="0">
-                <a:solidFill>
-                  <a:srgbClr val="333333"/>
-                </a:solidFill>
-                <a:latin typeface="Calibri"/>
-              </a:rPr>
-              <a:t>1.</a:t>
-            </a:r>
-            <a:r>
-              <a:rPr sz="1200" b="0" i="0">
-                <a:solidFill>
-                  <a:srgbClr val="333333"/>
-                </a:solidFill>
-                <a:latin typeface="Calibri"/>
-              </a:rPr>
-              <a:t> El checkpoint de avance PI VetCare:</a:t>
-            </a:r>
-          </a:p>
-          <a:p>
-            <a:pPr>
-              <a:spcAft>
-                <a:spcPts val="800"/>
-              </a:spcAft>
-            </a:pPr>
-            <a:r>
-              <a:rPr sz="1200" b="0" i="0">
-                <a:solidFill>
-                  <a:srgbClr val="333333"/>
-                </a:solidFill>
-                <a:latin typeface="Calibri"/>
-              </a:rPr>
-              <a:t>–   ('A) Reemplaza el Parcial 3', 1)</a:t>
-            </a:r>
-          </a:p>
-          <a:p>
-            <a:pPr>
-              <a:spcAft>
-                <a:spcPts val="800"/>
-              </a:spcAft>
-            </a:pPr>
-            <a:r>
-              <a:rPr sz="1200" b="0" i="0">
-                <a:solidFill>
-                  <a:srgbClr val="333333"/>
-                </a:solidFill>
-                <a:latin typeface="Calibri"/>
-              </a:rPr>
-              <a:t>–   ('B) Es revisión de evidencias, no la sustentación final', 1)</a:t>
-            </a:r>
-          </a:p>
-          <a:p>
-            <a:pPr>
-              <a:spcAft>
-                <a:spcPts val="800"/>
-              </a:spcAft>
-            </a:pPr>
-            <a:r>
-              <a:rPr sz="1200" b="0" i="0">
-                <a:solidFill>
-                  <a:srgbClr val="333333"/>
-                </a:solidFill>
-                <a:latin typeface="Calibri"/>
-              </a:rPr>
-              <a:t>–   ('C) Cierra el semestre', 1)</a:t>
-            </a:r>
-          </a:p>
-          <a:p>
-            <a:pPr>
-              <a:spcAft>
-                <a:spcPts val="800"/>
-              </a:spcAft>
-            </a:pPr>
-            <a:r>
-              <a:rPr sz="1200" b="0" i="0">
-                <a:solidFill>
-                  <a:srgbClr val="333333"/>
-                </a:solidFill>
-                <a:latin typeface="Calibri"/>
-              </a:rPr>
-              <a:t>–   ('D) Elimina la rúbrica', 1)</a:t>
-            </a:r>
-          </a:p>
-          <a:p>
-            <a:pPr>
-              <a:spcAft>
-                <a:spcPts val="800"/>
-              </a:spcAft>
-            </a:pPr>
-            <a:r>
-              <a:rPr sz="1200" b="0" i="0">
-                <a:solidFill>
-                  <a:srgbClr val="333333"/>
-                </a:solidFill>
-                <a:latin typeface="Calibri"/>
-              </a:rPr>
-              <a:t>–   </a:t>
-            </a:r>
-            <a:r>
-              <a:rPr sz="1200" b="1" i="0">
-                <a:solidFill>
-                  <a:srgbClr val="333333"/>
-                </a:solidFill>
-                <a:latin typeface="Calibri"/>
-              </a:rPr>
-              <a:t>2.</a:t>
-            </a:r>
-            <a:r>
-              <a:rPr sz="1200" b="0" i="0">
-                <a:solidFill>
-                  <a:srgbClr val="333333"/>
-                </a:solidFill>
-                <a:latin typeface="Calibri"/>
-              </a:rPr>
-              <a:t> Evidencia mínima esperable en el avance:</a:t>
-            </a:r>
-          </a:p>
-          <a:p>
-            <a:pPr>
-              <a:spcAft>
-                <a:spcPts val="800"/>
-              </a:spcAft>
-            </a:pPr>
-            <a:r>
-              <a:rPr sz="1200" b="0" i="0">
-                <a:solidFill>
-                  <a:srgbClr val="333333"/>
-                </a:solidFill>
-                <a:latin typeface="Calibri"/>
-              </a:rPr>
-              <a:t>–   ('A) Solo narrativa', 1)</a:t>
-            </a:r>
-          </a:p>
-          <a:p>
-            <a:pPr>
-              <a:spcAft>
-                <a:spcPts val="800"/>
-              </a:spcAft>
-            </a:pPr>
-            <a:r>
-              <a:rPr sz="1200" b="0" i="0">
-                <a:solidFill>
-                  <a:srgbClr val="333333"/>
-                </a:solidFill>
-                <a:latin typeface="Calibri"/>
-              </a:rPr>
-              <a:t>–   ('B) ER + scripts clave + demo parcial + checklist rúbrica', 1)</a:t>
-            </a:r>
-          </a:p>
-          <a:p>
-            <a:pPr>
-              <a:spcAft>
-                <a:spcPts val="800"/>
-              </a:spcAft>
-            </a:pPr>
-            <a:r>
-              <a:rPr sz="1200" b="0" i="0">
-                <a:solidFill>
-                  <a:srgbClr val="333333"/>
-                </a:solidFill>
-                <a:latin typeface="Calibri"/>
-              </a:rPr>
-              <a:t>–   ('C) Solo el logo', 1)</a:t>
-            </a:r>
-          </a:p>
-          <a:p>
-            <a:pPr>
-              <a:spcAft>
-                <a:spcPts val="800"/>
-              </a:spcAft>
-            </a:pPr>
-            <a:r>
-              <a:rPr sz="1200" b="0" i="0">
-                <a:solidFill>
-                  <a:srgbClr val="333333"/>
-                </a:solidFill>
-                <a:latin typeface="Calibri"/>
-              </a:rPr>
-              <a:t>–   ('D) Factura cloud de pago', 1)</a:t>
-            </a:r>
-          </a:p>
-          <a:p>
-            <a:pPr>
-              <a:spcAft>
-                <a:spcPts val="800"/>
-              </a:spcAft>
-            </a:pPr>
-            <a:r>
-              <a:rPr sz="1200" b="0" i="0">
-                <a:solidFill>
-                  <a:srgbClr val="333333"/>
-                </a:solidFill>
-                <a:latin typeface="Calibri"/>
-              </a:rPr>
-              <a:t>–   </a:t>
-            </a:r>
-            <a:r>
-              <a:rPr sz="1200" b="1" i="0">
-                <a:solidFill>
-                  <a:srgbClr val="333333"/>
-                </a:solidFill>
-                <a:latin typeface="Calibri"/>
-              </a:rPr>
-              <a:t>3.</a:t>
-            </a:r>
-            <a:r>
-              <a:rPr sz="1200" b="0" i="0">
-                <a:solidFill>
-                  <a:srgbClr val="333333"/>
-                </a:solidFill>
-                <a:latin typeface="Calibri"/>
-              </a:rPr>
-              <a:t> Si falta el contrato app↔BD, conviene marcarlo como pendiente en el checklist.</a:t>
-            </a:r>
-          </a:p>
-          <a:p>
-            <a:pPr>
-              <a:spcAft>
-                <a:spcPts val="800"/>
-              </a:spcAft>
-            </a:pPr>
-            <a:r>
-              <a:rPr sz="1200" b="0" i="0">
-                <a:solidFill>
-                  <a:srgbClr val="333333"/>
-                </a:solidFill>
-                <a:latin typeface="Calibri"/>
-              </a:rPr>
-              <a:t>–   ('( ) Verdadero    ( ) Falso', 1)</a:t>
-            </a:r>
-          </a:p>
-          <a:p>
-            <a:pPr>
-              <a:spcAft>
-                <a:spcPts val="800"/>
-              </a:spcAft>
-            </a:pPr>
-            <a:r>
-              <a:rPr sz="1200" b="0" i="0">
-                <a:solidFill>
-                  <a:srgbClr val="333333"/>
-                </a:solidFill>
-                <a:latin typeface="Calibri"/>
-              </a:rPr>
-              <a:t>–   </a:t>
-            </a:r>
-            <a:r>
-              <a:rPr sz="1200" b="1" i="0">
-                <a:solidFill>
-                  <a:srgbClr val="333333"/>
-                </a:solidFill>
-                <a:latin typeface="Calibri"/>
-              </a:rPr>
-              <a:t>4.</a:t>
-            </a:r>
-            <a:r>
-              <a:rPr sz="1200" b="0" i="0">
-                <a:solidFill>
-                  <a:srgbClr val="333333"/>
-                </a:solidFill>
-                <a:latin typeface="Calibri"/>
-              </a:rPr>
-              <a:t> Seed de datos de prueba no aporta a la demo del PI.</a:t>
-            </a:r>
-          </a:p>
-          <a:p>
-            <a:pPr>
-              <a:spcAft>
-                <a:spcPts val="800"/>
-              </a:spcAft>
-            </a:pPr>
-            <a:r>
-              <a:rPr sz="1200" b="0" i="0">
-                <a:solidFill>
-                  <a:srgbClr val="333333"/>
-                </a:solidFill>
-                <a:latin typeface="Calibri"/>
-              </a:rPr>
-              <a:t>–   ('( ) Verdadero    ( ) Falso', 1)</a:t>
-            </a:r>
-          </a:p>
-        </p:txBody>
-      </p:sp>
-      <p:sp>
-        <p:nvSpPr>
-          <p:cNvPr id="7" name="TextBox 6"/>
-          <p:cNvSpPr txBox="1"/>
-          <p:nvPr/>
-        </p:nvSpPr>
-        <p:spPr>
-          <a:xfrm>
-            <a:off x="11185855" y="6473952"/>
-            <a:ext cx="640080" cy="274320"/>
-          </a:xfrm>
-          <a:prstGeom prst="rect">
-            <a:avLst/>
-          </a:prstGeom>
-          <a:noFill/>
-        </p:spPr>
-        <p:txBody>
-          <a:bodyPr wrap="square">
-            <a:spAutoFit/>
-          </a:bodyPr>
-          <a:lstStyle/>
-          <a:p>
-            <a:pPr algn="r"/>
-            <a:r>
-              <a:rPr sz="1100" b="0" i="0">
-                <a:solidFill>
-                  <a:srgbClr val="666666"/>
-                </a:solidFill>
-                <a:latin typeface="Calibri"/>
-              </a:rPr>
-              <a:t>14</a:t>
-            </a:r>
-          </a:p>
-        </p:txBody>
-      </p:sp>
-    </p:spTree>
-  </p:cSld>
-  <p:clrMapOvr>
-    <a:masterClrMapping/>
-  </p:clrMapOvr>
-</p:sld>
-</file>
-
-<file path=ppt/slides/slide15.xml><?xml version="1.0" encoding="utf-8"?>
-<p:sld xmlns:a="http://schemas.openxmlformats.org/drawingml/2006/main" xmlns:p="http://schemas.openxmlformats.org/presentationml/2006/main" xmlns:r="http://schemas.openxmlformats.org/officeDocument/2006/relationships">
-  <p:cSld>
-    <p:bg>
-      <p:bgPr>
-        <a:solidFill>
-          <a:srgbClr val="FFFFFF"/>
-        </a:solidFill>
-        <a:effectLst/>
-      </p:bgPr>
-    </p:bg>
-    <p:spTree>
-      <p:nvGrpSpPr>
-        <p:cNvPr id="1" name=""/>
-        <p:cNvGrpSpPr/>
-        <p:nvPr/>
-      </p:nvGrpSpPr>
-      <p:grpSpPr/>
-      <p:sp>
-        <p:nvSpPr>
-          <p:cNvPr id="2" name="Rectangle 1"/>
-          <p:cNvSpPr/>
-          <p:nvPr/>
-        </p:nvSpPr>
-        <p:spPr>
-          <a:xfrm>
-            <a:off x="0" y="0"/>
-            <a:ext cx="12191695" cy="1170432"/>
-          </a:xfrm>
-          <a:prstGeom prst="rect">
-            <a:avLst/>
-          </a:prstGeom>
-          <a:solidFill>
-            <a:srgbClr val="095292"/>
-          </a:solidFill>
-          <a:ln>
-            <a:noFill/>
-          </a:ln>
-        </p:spPr>
-        <p:style>
-          <a:lnRef idx="1">
-            <a:schemeClr val="accent1"/>
-          </a:lnRef>
-          <a:fillRef idx="3">
-            <a:schemeClr val="accent1"/>
-          </a:fillRef>
-          <a:effectRef idx="2">
-            <a:schemeClr val="accent1"/>
-          </a:effectRef>
-          <a:fontRef idx="minor">
-            <a:schemeClr val="lt1"/>
-          </a:fontRef>
-        </p:style>
-        <p:txBody>
-          <a:bodyPr rtlCol="0" anchor="ctr"/>
-          <a:lstStyle/>
-          <a:p>
-            <a:pPr algn="ctr"/>
-          </a:p>
-        </p:txBody>
-      </p:sp>
-      <p:sp>
-        <p:nvSpPr>
-          <p:cNvPr id="3" name="Rectangle 2"/>
-          <p:cNvSpPr/>
-          <p:nvPr/>
-        </p:nvSpPr>
-        <p:spPr>
-          <a:xfrm>
-            <a:off x="0" y="1170432"/>
-            <a:ext cx="12191695" cy="41148"/>
-          </a:xfrm>
-          <a:prstGeom prst="rect">
-            <a:avLst/>
-          </a:prstGeom>
-          <a:solidFill>
-            <a:srgbClr val="FFD000"/>
-          </a:solidFill>
-          <a:ln>
-            <a:noFill/>
-          </a:ln>
-        </p:spPr>
-        <p:style>
-          <a:lnRef idx="1">
-            <a:schemeClr val="accent1"/>
-          </a:lnRef>
-          <a:fillRef idx="3">
-            <a:schemeClr val="accent1"/>
-          </a:fillRef>
-          <a:effectRef idx="2">
-            <a:schemeClr val="accent1"/>
-          </a:effectRef>
-          <a:fontRef idx="minor">
-            <a:schemeClr val="lt1"/>
-          </a:fontRef>
-        </p:style>
-        <p:txBody>
-          <a:bodyPr rtlCol="0" anchor="ctr"/>
-          <a:lstStyle/>
-          <a:p>
-            <a:pPr algn="ctr"/>
-          </a:p>
-        </p:txBody>
-      </p:sp>
-      <p:sp>
-        <p:nvSpPr>
-          <p:cNvPr id="4" name="TextBox 3"/>
-          <p:cNvSpPr txBox="1"/>
-          <p:nvPr/>
-        </p:nvSpPr>
-        <p:spPr>
-          <a:xfrm>
-            <a:off x="457200" y="164592"/>
-            <a:ext cx="11277295" cy="384048"/>
-          </a:xfrm>
-          <a:prstGeom prst="rect">
-            <a:avLst/>
-          </a:prstGeom>
-          <a:noFill/>
-        </p:spPr>
-        <p:txBody>
-          <a:bodyPr wrap="square">
-            <a:spAutoFit/>
-          </a:bodyPr>
-          <a:lstStyle/>
-          <a:p>
-            <a:r>
-              <a:rPr sz="2600" b="1" i="0">
-                <a:solidFill>
-                  <a:srgbClr val="FFFFFF"/>
-                </a:solidFill>
-                <a:latin typeface="Calibri"/>
-              </a:rPr>
-              <a:t>Quiz rapido (cierre) · cont. 2</a:t>
-            </a:r>
-          </a:p>
-        </p:txBody>
-      </p:sp>
-      <p:sp>
-        <p:nvSpPr>
-          <p:cNvPr id="5" name="TextBox 4"/>
-          <p:cNvSpPr txBox="1"/>
-          <p:nvPr/>
-        </p:nvSpPr>
-        <p:spPr>
-          <a:xfrm>
-            <a:off x="457200" y="566928"/>
-            <a:ext cx="11277295" cy="411480"/>
-          </a:xfrm>
-          <a:prstGeom prst="rect">
-            <a:avLst/>
-          </a:prstGeom>
-          <a:noFill/>
-        </p:spPr>
-        <p:txBody>
-          <a:bodyPr wrap="square">
-            <a:spAutoFit/>
-          </a:bodyPr>
-          <a:lstStyle/>
-          <a:p>
-            <a:r>
-              <a:rPr sz="1400" b="0" i="0">
-                <a:solidFill>
-                  <a:srgbClr val="B8D8EE"/>
-                </a:solidFill>
-                <a:latin typeface="Calibri"/>
-              </a:rPr>
-              <a:t>Individual · 8–10 min</a:t>
-            </a:r>
-          </a:p>
-        </p:txBody>
-      </p:sp>
-      <p:sp>
-        <p:nvSpPr>
-          <p:cNvPr id="6" name="TextBox 5"/>
-          <p:cNvSpPr txBox="1"/>
-          <p:nvPr/>
-        </p:nvSpPr>
-        <p:spPr>
-          <a:xfrm>
-            <a:off x="457200" y="1380744"/>
-            <a:ext cx="11277295" cy="5020056"/>
-          </a:xfrm>
-          <a:prstGeom prst="rect">
-            <a:avLst/>
-          </a:prstGeom>
-          <a:noFill/>
-        </p:spPr>
-        <p:txBody>
-          <a:bodyPr wrap="square">
-            <a:spAutoFit/>
-          </a:bodyPr>
-          <a:lstStyle/>
-          <a:p>
-            <a:pPr>
-              <a:spcAft>
-                <a:spcPts val="800"/>
-              </a:spcAft>
-            </a:pPr>
-            <a:r>
-              <a:rPr sz="1200" b="0" i="0">
-                <a:solidFill>
-                  <a:srgbClr val="333333"/>
-                </a:solidFill>
-                <a:latin typeface="Calibri"/>
-              </a:rPr>
-              <a:t>–   </a:t>
-            </a:r>
-            <a:r>
-              <a:rPr sz="1200" b="1" i="0">
-                <a:solidFill>
-                  <a:srgbClr val="333333"/>
-                </a:solidFill>
-                <a:latin typeface="Calibri"/>
-              </a:rPr>
-              <a:t>5.</a:t>
-            </a:r>
-            <a:r>
-              <a:rPr sz="1200" b="0" i="0">
-                <a:solidFill>
-                  <a:srgbClr val="333333"/>
-                </a:solidFill>
-                <a:latin typeface="Calibri"/>
-              </a:rPr>
-              <a:t> Durante la viva/demo parcial, lo más útil es:</a:t>
-            </a:r>
-          </a:p>
-          <a:p>
-            <a:pPr>
-              <a:spcAft>
-                <a:spcPts val="800"/>
-              </a:spcAft>
-            </a:pPr>
-            <a:r>
-              <a:rPr sz="1200" b="0" i="0">
-                <a:solidFill>
-                  <a:srgbClr val="333333"/>
-                </a:solidFill>
-                <a:latin typeface="Calibri"/>
-              </a:rPr>
-              <a:t>–   ('A) Improvisar sin script', 1)</a:t>
-            </a:r>
-          </a:p>
-          <a:p>
-            <a:pPr>
-              <a:spcAft>
-                <a:spcPts val="800"/>
-              </a:spcAft>
-            </a:pPr>
-            <a:r>
-              <a:rPr sz="1200" b="0" i="0">
-                <a:solidFill>
-                  <a:srgbClr val="333333"/>
-                </a:solidFill>
-                <a:latin typeface="Calibri"/>
-              </a:rPr>
-              <a:t>–   ('B) Mostrar flujo real (agendar/facturar) con datos seed', 1)</a:t>
-            </a:r>
-          </a:p>
-          <a:p>
-            <a:pPr>
-              <a:spcAft>
-                <a:spcPts val="800"/>
-              </a:spcAft>
-            </a:pPr>
-            <a:r>
-              <a:rPr sz="1200" b="0" i="0">
-                <a:solidFill>
-                  <a:srgbClr val="333333"/>
-                </a:solidFill>
-                <a:latin typeface="Calibri"/>
-              </a:rPr>
-              <a:t>–   ('C) Leer el microcurrículo completo', 1)</a:t>
-            </a:r>
-          </a:p>
-          <a:p>
-            <a:pPr>
-              <a:spcAft>
-                <a:spcPts val="800"/>
-              </a:spcAft>
-            </a:pPr>
-            <a:r>
-              <a:rPr sz="1200" b="0" i="0">
-                <a:solidFill>
-                  <a:srgbClr val="333333"/>
-                </a:solidFill>
-                <a:latin typeface="Calibri"/>
-              </a:rPr>
-              <a:t>–   ('D) Ocultar errores siempre', 1)</a:t>
-            </a:r>
-          </a:p>
-          <a:p>
-            <a:pPr>
-              <a:spcAft>
-                <a:spcPts val="800"/>
-              </a:spcAft>
-            </a:pPr>
-            <a:r>
-              <a:rPr sz="1200" b="0" i="0">
-                <a:solidFill>
-                  <a:srgbClr val="333333"/>
-                </a:solidFill>
-                <a:latin typeface="Calibri"/>
-              </a:rPr>
-              <a:t>–   </a:t>
-            </a:r>
-            <a:r>
-              <a:rPr sz="1200" b="1" i="0">
-                <a:solidFill>
-                  <a:srgbClr val="333333"/>
-                </a:solidFill>
-                <a:latin typeface="Calibri"/>
-              </a:rPr>
-              <a:t>6.</a:t>
-            </a:r>
-            <a:r>
-              <a:rPr sz="1200" b="0" i="0">
-                <a:solidFill>
-                  <a:srgbClr val="333333"/>
-                </a:solidFill>
-                <a:latin typeface="Calibri"/>
-              </a:rPr>
-              <a:t> Anti-patrón: SQL suelto en la app que bypasea procs y auditoría.</a:t>
-            </a:r>
-          </a:p>
-          <a:p>
-            <a:pPr>
-              <a:spcAft>
-                <a:spcPts val="800"/>
-              </a:spcAft>
-            </a:pPr>
-            <a:r>
-              <a:rPr sz="1200" b="0" i="0">
-                <a:solidFill>
-                  <a:srgbClr val="333333"/>
-                </a:solidFill>
-                <a:latin typeface="Calibri"/>
-              </a:rPr>
-              <a:t>–   ('( ) Verdadero    ( ) Falso', 1)</a:t>
-            </a:r>
-          </a:p>
-          <a:p>
-            <a:pPr>
-              <a:spcAft>
-                <a:spcPts val="800"/>
-              </a:spcAft>
-            </a:pPr>
-            <a:r>
-              <a:rPr sz="1200" b="0" i="0">
-                <a:solidFill>
-                  <a:srgbClr val="333333"/>
-                </a:solidFill>
-                <a:latin typeface="Calibri"/>
-              </a:rPr>
-              <a:t>–   </a:t>
-            </a:r>
-            <a:r>
-              <a:rPr sz="1200" b="1" i="0">
-                <a:solidFill>
-                  <a:srgbClr val="333333"/>
-                </a:solidFill>
-                <a:latin typeface="Calibri"/>
-              </a:rPr>
-              <a:t>7.</a:t>
-            </a:r>
-            <a:r>
-              <a:rPr sz="1200" b="0" i="0">
-                <a:solidFill>
-                  <a:srgbClr val="333333"/>
-                </a:solidFill>
-                <a:latin typeface="Calibri"/>
-              </a:rPr>
-              <a:t> Liste 3 ítems del checklist PI que YA tienen evidencia en su equipo.</a:t>
-            </a:r>
-          </a:p>
-          <a:p>
-            <a:pPr>
-              <a:spcAft>
-                <a:spcPts val="800"/>
-              </a:spcAft>
-            </a:pPr>
-            <a:r>
-              <a:rPr sz="1200" b="0" i="0">
-                <a:solidFill>
-                  <a:srgbClr val="333333"/>
-                </a:solidFill>
-                <a:latin typeface="Calibri"/>
-              </a:rPr>
-              <a:t>–   ('Respuesta corta: ____________________________', 1)</a:t>
-            </a:r>
-          </a:p>
-          <a:p>
-            <a:pPr>
-              <a:spcAft>
-                <a:spcPts val="800"/>
-              </a:spcAft>
-            </a:pPr>
-            <a:r>
-              <a:rPr sz="1200" b="0" i="0">
-                <a:solidFill>
-                  <a:srgbClr val="333333"/>
-                </a:solidFill>
-                <a:latin typeface="Calibri"/>
-              </a:rPr>
-              <a:t>–   </a:t>
-            </a:r>
-            <a:r>
-              <a:rPr sz="1200" b="1" i="0">
-                <a:solidFill>
-                  <a:srgbClr val="333333"/>
-                </a:solidFill>
-                <a:latin typeface="Calibri"/>
-              </a:rPr>
-              <a:t>8.</a:t>
-            </a:r>
-            <a:r>
-              <a:rPr sz="1200" b="0" i="0">
-                <a:solidFill>
-                  <a:srgbClr val="333333"/>
-                </a:solidFill>
-                <a:latin typeface="Calibri"/>
-              </a:rPr>
-              <a:t> Nombre el mayor hueco actual y la clase/hito donde lo cerrarán.</a:t>
-            </a:r>
-          </a:p>
-          <a:p>
-            <a:pPr>
-              <a:spcAft>
-                <a:spcPts val="800"/>
-              </a:spcAft>
-            </a:pPr>
-            <a:r>
-              <a:rPr sz="1200" b="0" i="0">
-                <a:solidFill>
-                  <a:srgbClr val="333333"/>
-                </a:solidFill>
-                <a:latin typeface="Calibri"/>
-              </a:rPr>
-              <a:t>–   ('Respuesta corta: ____________________________', 1)</a:t>
-            </a:r>
-          </a:p>
-        </p:txBody>
-      </p:sp>
-      <p:sp>
-        <p:nvSpPr>
-          <p:cNvPr id="7" name="TextBox 6"/>
-          <p:cNvSpPr txBox="1"/>
-          <p:nvPr/>
-        </p:nvSpPr>
-        <p:spPr>
-          <a:xfrm>
-            <a:off x="11185855" y="6473952"/>
-            <a:ext cx="640080" cy="274320"/>
-          </a:xfrm>
-          <a:prstGeom prst="rect">
-            <a:avLst/>
-          </a:prstGeom>
-          <a:noFill/>
-        </p:spPr>
-        <p:txBody>
-          <a:bodyPr wrap="square">
-            <a:spAutoFit/>
-          </a:bodyPr>
-          <a:lstStyle/>
-          <a:p>
-            <a:pPr algn="r"/>
-            <a:r>
-              <a:rPr sz="1100" b="0" i="0">
-                <a:solidFill>
-                  <a:srgbClr val="666666"/>
-                </a:solidFill>
-                <a:latin typeface="Calibri"/>
-              </a:rPr>
-              <a:t>15</a:t>
-            </a:r>
-          </a:p>
-        </p:txBody>
-      </p:sp>
-    </p:spTree>
-  </p:cSld>
-  <p:clrMapOvr>
-    <a:masterClrMapping/>
-  </p:clrMapOvr>
-</p:sld>
-</file>
-
-<file path=ppt/slides/slide16.xml><?xml version="1.0" encoding="utf-8"?>
-<p:sld xmlns:a="http://schemas.openxmlformats.org/drawingml/2006/main" xmlns:p="http://schemas.openxmlformats.org/presentationml/2006/main" xmlns:r="http://schemas.openxmlformats.org/officeDocument/2006/relationships">
-  <p:cSld>
-    <p:bg>
-      <p:bgPr>
-        <a:solidFill>
-          <a:srgbClr val="FFFFFF"/>
-        </a:solidFill>
-        <a:effectLst/>
-      </p:bgPr>
-    </p:bg>
-    <p:spTree>
-      <p:nvGrpSpPr>
-        <p:cNvPr id="1" name=""/>
-        <p:cNvGrpSpPr/>
-        <p:nvPr/>
-      </p:nvGrpSpPr>
-      <p:grpSpPr/>
-      <p:sp>
-        <p:nvSpPr>
-          <p:cNvPr id="2" name="Rectangle 1"/>
-          <p:cNvSpPr/>
-          <p:nvPr/>
-        </p:nvSpPr>
-        <p:spPr>
-          <a:xfrm>
-            <a:off x="0" y="0"/>
             <a:ext cx="12191695" cy="164592"/>
           </a:xfrm>
           <a:prstGeom prst="rect">
@@ -8230,7 +7217,7 @@
                 </a:solidFill>
                 <a:latin typeface="Calibri"/>
               </a:rPr>
-              <a:t>Criterios · quiz/cierre · duda PI</a:t>
+              <a:t>Criterios de exito · cierre · dudas del PI</a:t>
             </a:r>
           </a:p>
         </p:txBody>

--- a/Bases de Datos II/Clases/Clase 11 - Avance del proyecto final/Presentacion.pptx
+++ b/Bases de Datos II/Clases/Clase 11 - Avance del proyecto final/Presentacion.pptx
@@ -5219,7 +5219,7 @@
                 </a:solidFill>
                 <a:latin typeface="Calibri"/>
               </a:rPr>
-              <a:t> (Talleres) — domingo 23:59 cuando aplique taller.</a:t>
+              <a:t> (https://examlab.lovable.app/) — domingo 23:59 cuando aplique taller.</a:t>
             </a:r>
           </a:p>
         </p:txBody>
@@ -5814,7 +5814,7 @@
                 </a:solidFill>
                 <a:latin typeface="Calibri"/>
               </a:rPr>
-              <a:t>Taller de la semana en ExamLab: domingo 23:59 (regla del Acuerdo) cuando aplique.</a:t>
+              <a:t>Taller de la semana en ExamLab (https://examlab.lovable.app/): domingo 23:59 (regla del Acuerdo) cuando aplique.</a:t>
             </a:r>
           </a:p>
         </p:txBody>

--- a/Bases de Datos II/Clases/Clase 11 - Avance del proyecto final/Presentacion.pptx
+++ b/Bases de Datos II/Clases/Clase 11 - Avance del proyecto final/Presentacion.pptx
@@ -5169,7 +5169,7 @@
                 </a:solidFill>
                 <a:latin typeface="Calibri"/>
               </a:rPr>
-              <a:t>–   Evidencia en playground (enlace) o archivo SQL/PNG del equipo.</a:t>
+              <a:t>–   Evidencia en playground (enlace) o archivo SQL/PNG propio.</a:t>
             </a:r>
           </a:p>
           <a:p>
@@ -6418,7 +6418,7 @@
                 </a:solidFill>
                 <a:latin typeface="Calibri"/>
               </a:rPr>
-              <a:t>–   Al salir: avance concreto en el paquete VetCare del equipo.</a:t>
+              <a:t>–   Al salir: avance concreto en su paquete VetCare.</a:t>
             </a:r>
           </a:p>
         </p:txBody>
@@ -7522,7 +7522,7 @@
                 </a:solidFill>
                 <a:latin typeface="Calibri"/>
               </a:rPr>
-              <a:t>–   Feedback entre pares: 10 min por equipo.</a:t>
+              <a:t>–   Revision cruzada entre estudiantes: 10 min por persona.</a:t>
             </a:r>
           </a:p>
         </p:txBody>
@@ -7826,7 +7826,7 @@
                 </a:solidFill>
                 <a:latin typeface="Calibri"/>
               </a:rPr>
-              <a:t>–   Al final de la demo: dejar enlace/script compartible al equipo.</a:t>
+              <a:t>–   Al final de la demo: dejar enlace/script compartible al grupo.</a:t>
             </a:r>
           </a:p>
         </p:txBody>

--- a/Bases de Datos II/Clases/Clase 11 - Avance del proyecto final/Presentacion.pptx
+++ b/Bases de Datos II/Clases/Clase 11 - Avance del proyecto final/Presentacion.pptx
@@ -5219,7 +5219,7 @@
                 </a:solidFill>
                 <a:latin typeface="Calibri"/>
               </a:rPr>
-              <a:t> (https://examlab.lovable.app/) — domingo 23:59 cuando aplique taller.</a:t>
+              <a:t> (https://uniaj.examlab.workers.dev/) — domingo 23:59 cuando aplique taller.</a:t>
             </a:r>
           </a:p>
         </p:txBody>
@@ -5814,7 +5814,7 @@
                 </a:solidFill>
                 <a:latin typeface="Calibri"/>
               </a:rPr>
-              <a:t>Taller de la semana en ExamLab (https://examlab.lovable.app/): domingo 23:59 (regla del Acuerdo) cuando aplique.</a:t>
+              <a:t>Taller de la semana en ExamLab (https://uniaj.examlab.workers.dev/): domingo 23:59 (regla del Acuerdo) cuando aplique.</a:t>
             </a:r>
           </a:p>
         </p:txBody>

--- a/Bases de Datos II/Clases/Clase 11 - Avance del proyecto final/Presentacion.pptx
+++ b/Bases de Datos II/Clases/Clase 11 - Avance del proyecto final/Presentacion.pptx
@@ -19,6 +19,7 @@
     <p:sldId id="267" r:id="rId18"/>
     <p:sldId id="268" r:id="rId19"/>
     <p:sldId id="269" r:id="rId20"/>
+    <p:sldId id="270" r:id="rId21"/>
   </p:sldIdLst>
   <p:sldSz cx="12191695" cy="6858000" type="screen4x3"/>
   <p:notesSz cx="6858000" cy="9144000"/>
@@ -3619,111 +3620,21 @@
                 </a:solidFill>
                 <a:latin typeface="Calibri"/>
               </a:rPr>
-              <a:t>Taller PI VetCare — pasos guiados</a:t>
-            </a:r>
-          </a:p>
-        </p:txBody>
-      </p:sp>
-      <p:sp>
-        <p:nvSpPr>
-          <p:cNvPr id="5" name="Rounded Rectangle 4"/>
-          <p:cNvSpPr/>
-          <p:nvPr/>
-        </p:nvSpPr>
-        <p:spPr>
-          <a:xfrm>
-            <a:off x="457200" y="1234440"/>
-            <a:ext cx="11277295" cy="777240"/>
-          </a:xfrm>
-          <a:prstGeom prst="roundRect">
-            <a:avLst>
-              <a:gd name="adj" fmla="val 12000"/>
-            </a:avLst>
-          </a:prstGeom>
-          <a:solidFill>
-            <a:srgbClr val="F2F2F2"/>
-          </a:solidFill>
-          <a:ln>
-            <a:noFill/>
-          </a:ln>
-        </p:spPr>
-        <p:style>
-          <a:lnRef idx="1">
-            <a:schemeClr val="accent1"/>
-          </a:lnRef>
-          <a:fillRef idx="3">
-            <a:schemeClr val="accent1"/>
-          </a:fillRef>
-          <a:effectRef idx="2">
-            <a:schemeClr val="accent1"/>
-          </a:effectRef>
-          <a:fontRef idx="minor">
-            <a:schemeClr val="lt1"/>
-          </a:fontRef>
-        </p:style>
-        <p:txBody>
-          <a:bodyPr rtlCol="0" anchor="ctr"/>
-          <a:lstStyle/>
-          <a:p>
-            <a:pPr algn="ctr"/>
-          </a:p>
-        </p:txBody>
-      </p:sp>
-      <p:sp>
-        <p:nvSpPr>
-          <p:cNvPr id="6" name="Rounded Rectangle 5"/>
-          <p:cNvSpPr/>
-          <p:nvPr/>
-        </p:nvSpPr>
-        <p:spPr>
-          <a:xfrm>
-            <a:off x="594360" y="1403604"/>
-            <a:ext cx="438912" cy="438912"/>
-          </a:xfrm>
-          <a:prstGeom prst="roundRect">
-            <a:avLst>
-              <a:gd name="adj" fmla="val 12000"/>
-            </a:avLst>
-          </a:prstGeom>
-          <a:solidFill>
-            <a:srgbClr val="095292"/>
-          </a:solidFill>
-          <a:ln>
-            <a:noFill/>
-          </a:ln>
-        </p:spPr>
-        <p:style>
-          <a:lnRef idx="1">
-            <a:schemeClr val="accent1"/>
-          </a:lnRef>
-          <a:fillRef idx="3">
-            <a:schemeClr val="accent1"/>
-          </a:fillRef>
-          <a:effectRef idx="2">
-            <a:schemeClr val="accent1"/>
-          </a:effectRef>
-          <a:fontRef idx="minor">
-            <a:schemeClr val="lt1"/>
-          </a:fontRef>
-        </p:style>
-        <p:txBody>
-          <a:bodyPr rtlCol="0" anchor="ctr"/>
-          <a:lstStyle/>
-          <a:p>
-            <a:pPr algn="ctr"/>
-          </a:p>
-        </p:txBody>
-      </p:sp>
-      <p:sp>
-        <p:nvSpPr>
-          <p:cNvPr id="7" name="TextBox 6"/>
+              <a:t>Taller PI VetCare — escenario / datos de partida</a:t>
+            </a:r>
+          </a:p>
+        </p:txBody>
+      </p:sp>
+      <p:sp>
+        <p:nvSpPr>
+          <p:cNvPr id="5" name="TextBox 4"/>
           <p:cNvSpPr txBox="1"/>
           <p:nvPr/>
         </p:nvSpPr>
         <p:spPr>
           <a:xfrm>
-            <a:off x="594360" y="1403604"/>
-            <a:ext cx="438912" cy="438912"/>
+            <a:off x="457200" y="1170432"/>
+            <a:ext cx="11277295" cy="5230368"/>
           </a:xfrm>
           <a:prstGeom prst="rect">
             <a:avLst/>
@@ -3731,522 +3642,31 @@
           <a:noFill/>
         </p:spPr>
         <p:txBody>
-          <a:bodyPr wrap="square" anchor="ctr"/>
-          <a:lstStyle/>
-          <a:p>
-            <a:pPr algn="ctr"/>
-            <a:r>
-              <a:rPr sz="1600" b="1" i="0">
-                <a:solidFill>
-                  <a:srgbClr val="FFFFFF"/>
-                </a:solidFill>
-                <a:latin typeface="Calibri"/>
-              </a:rPr>
-              <a:t>1</a:t>
-            </a:r>
-          </a:p>
-        </p:txBody>
-      </p:sp>
-      <p:sp>
-        <p:nvSpPr>
-          <p:cNvPr id="8" name="TextBox 7"/>
-          <p:cNvSpPr txBox="1"/>
-          <p:nvPr/>
-        </p:nvSpPr>
-        <p:spPr>
-          <a:xfrm>
-            <a:off x="1188720" y="1325880"/>
-            <a:ext cx="10271455" cy="612647"/>
-          </a:xfrm>
-          <a:prstGeom prst="rect">
-            <a:avLst/>
-          </a:prstGeom>
-          <a:noFill/>
-        </p:spPr>
-        <p:txBody>
-          <a:bodyPr wrap="square" anchor="ctr"/>
-          <a:lstStyle/>
-          <a:p>
-            <a:r>
-              <a:rPr sz="1500" b="1" i="0">
-                <a:solidFill>
-                  <a:srgbClr val="095292"/>
-                </a:solidFill>
-                <a:latin typeface="Calibri"/>
-              </a:rPr>
-              <a:t>Completar checklist de avance (si/no/parcial).</a:t>
-            </a:r>
-          </a:p>
-        </p:txBody>
-      </p:sp>
-      <p:sp>
-        <p:nvSpPr>
-          <p:cNvPr id="9" name="Rounded Rectangle 8"/>
-          <p:cNvSpPr/>
-          <p:nvPr/>
-        </p:nvSpPr>
-        <p:spPr>
-          <a:xfrm>
-            <a:off x="457200" y="2103120"/>
-            <a:ext cx="11277295" cy="777240"/>
-          </a:xfrm>
-          <a:prstGeom prst="roundRect">
-            <a:avLst>
-              <a:gd name="adj" fmla="val 12000"/>
-            </a:avLst>
-          </a:prstGeom>
-          <a:solidFill>
-            <a:srgbClr val="E8F4FA"/>
-          </a:solidFill>
-          <a:ln>
-            <a:noFill/>
-          </a:ln>
-        </p:spPr>
-        <p:style>
-          <a:lnRef idx="1">
-            <a:schemeClr val="accent1"/>
-          </a:lnRef>
-          <a:fillRef idx="3">
-            <a:schemeClr val="accent1"/>
-          </a:fillRef>
-          <a:effectRef idx="2">
-            <a:schemeClr val="accent1"/>
-          </a:effectRef>
-          <a:fontRef idx="minor">
-            <a:schemeClr val="lt1"/>
-          </a:fontRef>
-        </p:style>
-        <p:txBody>
-          <a:bodyPr rtlCol="0" anchor="ctr"/>
-          <a:lstStyle/>
-          <a:p>
-            <a:pPr algn="ctr"/>
-          </a:p>
-        </p:txBody>
-      </p:sp>
-      <p:sp>
-        <p:nvSpPr>
-          <p:cNvPr id="10" name="Rounded Rectangle 9"/>
-          <p:cNvSpPr/>
-          <p:nvPr/>
-        </p:nvSpPr>
-        <p:spPr>
-          <a:xfrm>
-            <a:off x="594360" y="2272284"/>
-            <a:ext cx="438912" cy="438912"/>
-          </a:xfrm>
-          <a:prstGeom prst="roundRect">
-            <a:avLst>
-              <a:gd name="adj" fmla="val 12000"/>
-            </a:avLst>
-          </a:prstGeom>
-          <a:solidFill>
-            <a:srgbClr val="095292"/>
-          </a:solidFill>
-          <a:ln>
-            <a:noFill/>
-          </a:ln>
-        </p:spPr>
-        <p:style>
-          <a:lnRef idx="1">
-            <a:schemeClr val="accent1"/>
-          </a:lnRef>
-          <a:fillRef idx="3">
-            <a:schemeClr val="accent1"/>
-          </a:fillRef>
-          <a:effectRef idx="2">
-            <a:schemeClr val="accent1"/>
-          </a:effectRef>
-          <a:fontRef idx="minor">
-            <a:schemeClr val="lt1"/>
-          </a:fontRef>
-        </p:style>
-        <p:txBody>
-          <a:bodyPr rtlCol="0" anchor="ctr"/>
-          <a:lstStyle/>
-          <a:p>
-            <a:pPr algn="ctr"/>
-          </a:p>
-        </p:txBody>
-      </p:sp>
-      <p:sp>
-        <p:nvSpPr>
-          <p:cNvPr id="11" name="TextBox 10"/>
-          <p:cNvSpPr txBox="1"/>
-          <p:nvPr/>
-        </p:nvSpPr>
-        <p:spPr>
-          <a:xfrm>
-            <a:off x="594360" y="2272284"/>
-            <a:ext cx="438912" cy="438912"/>
-          </a:xfrm>
-          <a:prstGeom prst="rect">
-            <a:avLst/>
-          </a:prstGeom>
-          <a:noFill/>
-        </p:spPr>
-        <p:txBody>
-          <a:bodyPr wrap="square" anchor="ctr"/>
-          <a:lstStyle/>
-          <a:p>
-            <a:pPr algn="ctr"/>
-            <a:r>
-              <a:rPr sz="1600" b="1" i="0">
-                <a:solidFill>
-                  <a:srgbClr val="FFFFFF"/>
-                </a:solidFill>
-                <a:latin typeface="Calibri"/>
-              </a:rPr>
-              <a:t>2</a:t>
-            </a:r>
-          </a:p>
-        </p:txBody>
-      </p:sp>
-      <p:sp>
-        <p:nvSpPr>
-          <p:cNvPr id="12" name="TextBox 11"/>
-          <p:cNvSpPr txBox="1"/>
-          <p:nvPr/>
-        </p:nvSpPr>
-        <p:spPr>
-          <a:xfrm>
-            <a:off x="1188720" y="2194560"/>
-            <a:ext cx="10271455" cy="612647"/>
-          </a:xfrm>
-          <a:prstGeom prst="rect">
-            <a:avLst/>
-          </a:prstGeom>
-          <a:noFill/>
-        </p:spPr>
-        <p:txBody>
-          <a:bodyPr wrap="square" anchor="ctr"/>
-          <a:lstStyle/>
-          <a:p>
-            <a:r>
-              <a:rPr sz="1500" b="1" i="0">
-                <a:solidFill>
-                  <a:srgbClr val="095292"/>
-                </a:solidFill>
-                <a:latin typeface="Calibri"/>
-              </a:rPr>
-              <a:t>Demo 3-5 min: ER + 1 proc + 1 trigger.</a:t>
-            </a:r>
-          </a:p>
-        </p:txBody>
-      </p:sp>
-      <p:sp>
-        <p:nvSpPr>
-          <p:cNvPr id="13" name="Rounded Rectangle 12"/>
-          <p:cNvSpPr/>
-          <p:nvPr/>
-        </p:nvSpPr>
-        <p:spPr>
-          <a:xfrm>
-            <a:off x="457200" y="2971800"/>
-            <a:ext cx="11277295" cy="777240"/>
-          </a:xfrm>
-          <a:prstGeom prst="roundRect">
-            <a:avLst>
-              <a:gd name="adj" fmla="val 12000"/>
-            </a:avLst>
-          </a:prstGeom>
-          <a:solidFill>
-            <a:srgbClr val="F2F2F2"/>
-          </a:solidFill>
-          <a:ln>
-            <a:noFill/>
-          </a:ln>
-        </p:spPr>
-        <p:style>
-          <a:lnRef idx="1">
-            <a:schemeClr val="accent1"/>
-          </a:lnRef>
-          <a:fillRef idx="3">
-            <a:schemeClr val="accent1"/>
-          </a:fillRef>
-          <a:effectRef idx="2">
-            <a:schemeClr val="accent1"/>
-          </a:effectRef>
-          <a:fontRef idx="minor">
-            <a:schemeClr val="lt1"/>
-          </a:fontRef>
-        </p:style>
-        <p:txBody>
-          <a:bodyPr rtlCol="0" anchor="ctr"/>
-          <a:lstStyle/>
-          <a:p>
-            <a:pPr algn="ctr"/>
-          </a:p>
-        </p:txBody>
-      </p:sp>
-      <p:sp>
-        <p:nvSpPr>
-          <p:cNvPr id="14" name="Rounded Rectangle 13"/>
-          <p:cNvSpPr/>
-          <p:nvPr/>
-        </p:nvSpPr>
-        <p:spPr>
-          <a:xfrm>
-            <a:off x="594360" y="3140964"/>
-            <a:ext cx="438912" cy="438912"/>
-          </a:xfrm>
-          <a:prstGeom prst="roundRect">
-            <a:avLst>
-              <a:gd name="adj" fmla="val 12000"/>
-            </a:avLst>
-          </a:prstGeom>
-          <a:solidFill>
-            <a:srgbClr val="095292"/>
-          </a:solidFill>
-          <a:ln>
-            <a:noFill/>
-          </a:ln>
-        </p:spPr>
-        <p:style>
-          <a:lnRef idx="1">
-            <a:schemeClr val="accent1"/>
-          </a:lnRef>
-          <a:fillRef idx="3">
-            <a:schemeClr val="accent1"/>
-          </a:fillRef>
-          <a:effectRef idx="2">
-            <a:schemeClr val="accent1"/>
-          </a:effectRef>
-          <a:fontRef idx="minor">
-            <a:schemeClr val="lt1"/>
-          </a:fontRef>
-        </p:style>
-        <p:txBody>
-          <a:bodyPr rtlCol="0" anchor="ctr"/>
-          <a:lstStyle/>
-          <a:p>
-            <a:pPr algn="ctr"/>
-          </a:p>
-        </p:txBody>
-      </p:sp>
-      <p:sp>
-        <p:nvSpPr>
-          <p:cNvPr id="15" name="TextBox 14"/>
-          <p:cNvSpPr txBox="1"/>
-          <p:nvPr/>
-        </p:nvSpPr>
-        <p:spPr>
-          <a:xfrm>
-            <a:off x="594360" y="3140964"/>
-            <a:ext cx="438912" cy="438912"/>
-          </a:xfrm>
-          <a:prstGeom prst="rect">
-            <a:avLst/>
-          </a:prstGeom>
-          <a:noFill/>
-        </p:spPr>
-        <p:txBody>
-          <a:bodyPr wrap="square" anchor="ctr"/>
-          <a:lstStyle/>
-          <a:p>
-            <a:pPr algn="ctr"/>
-            <a:r>
-              <a:rPr sz="1600" b="1" i="0">
-                <a:solidFill>
-                  <a:srgbClr val="FFFFFF"/>
-                </a:solidFill>
-                <a:latin typeface="Calibri"/>
-              </a:rPr>
-              <a:t>3</a:t>
-            </a:r>
-          </a:p>
-        </p:txBody>
-      </p:sp>
-      <p:sp>
-        <p:nvSpPr>
-          <p:cNvPr id="16" name="TextBox 15"/>
-          <p:cNvSpPr txBox="1"/>
-          <p:nvPr/>
-        </p:nvSpPr>
-        <p:spPr>
-          <a:xfrm>
-            <a:off x="1188720" y="3063240"/>
-            <a:ext cx="10271455" cy="612647"/>
-          </a:xfrm>
-          <a:prstGeom prst="rect">
-            <a:avLst/>
-          </a:prstGeom>
-          <a:noFill/>
-        </p:spPr>
-        <p:txBody>
-          <a:bodyPr wrap="square" anchor="ctr"/>
-          <a:lstStyle/>
-          <a:p>
-            <a:r>
-              <a:rPr sz="1500" b="1" i="0">
-                <a:solidFill>
-                  <a:srgbClr val="095292"/>
-                </a:solidFill>
-                <a:latin typeface="Calibri"/>
-              </a:rPr>
-              <a:t>Lista de gaps con responsable.</a:t>
-            </a:r>
-          </a:p>
-        </p:txBody>
-      </p:sp>
-      <p:sp>
-        <p:nvSpPr>
-          <p:cNvPr id="17" name="Rounded Rectangle 16"/>
-          <p:cNvSpPr/>
-          <p:nvPr/>
-        </p:nvSpPr>
-        <p:spPr>
-          <a:xfrm>
-            <a:off x="457200" y="3840479"/>
-            <a:ext cx="11277295" cy="777240"/>
-          </a:xfrm>
-          <a:prstGeom prst="roundRect">
-            <a:avLst>
-              <a:gd name="adj" fmla="val 12000"/>
-            </a:avLst>
-          </a:prstGeom>
-          <a:solidFill>
-            <a:srgbClr val="E8F4FA"/>
-          </a:solidFill>
-          <a:ln>
-            <a:noFill/>
-          </a:ln>
-        </p:spPr>
-        <p:style>
-          <a:lnRef idx="1">
-            <a:schemeClr val="accent1"/>
-          </a:lnRef>
-          <a:fillRef idx="3">
-            <a:schemeClr val="accent1"/>
-          </a:fillRef>
-          <a:effectRef idx="2">
-            <a:schemeClr val="accent1"/>
-          </a:effectRef>
-          <a:fontRef idx="minor">
-            <a:schemeClr val="lt1"/>
-          </a:fontRef>
-        </p:style>
-        <p:txBody>
-          <a:bodyPr rtlCol="0" anchor="ctr"/>
-          <a:lstStyle/>
-          <a:p>
-            <a:pPr algn="ctr"/>
-          </a:p>
-        </p:txBody>
-      </p:sp>
-      <p:sp>
-        <p:nvSpPr>
-          <p:cNvPr id="18" name="Rounded Rectangle 17"/>
-          <p:cNvSpPr/>
-          <p:nvPr/>
-        </p:nvSpPr>
-        <p:spPr>
-          <a:xfrm>
-            <a:off x="594360" y="4009643"/>
-            <a:ext cx="438912" cy="438912"/>
-          </a:xfrm>
-          <a:prstGeom prst="roundRect">
-            <a:avLst>
-              <a:gd name="adj" fmla="val 12000"/>
-            </a:avLst>
-          </a:prstGeom>
-          <a:solidFill>
-            <a:srgbClr val="095292"/>
-          </a:solidFill>
-          <a:ln>
-            <a:noFill/>
-          </a:ln>
-        </p:spPr>
-        <p:style>
-          <a:lnRef idx="1">
-            <a:schemeClr val="accent1"/>
-          </a:lnRef>
-          <a:fillRef idx="3">
-            <a:schemeClr val="accent1"/>
-          </a:fillRef>
-          <a:effectRef idx="2">
-            <a:schemeClr val="accent1"/>
-          </a:effectRef>
-          <a:fontRef idx="minor">
-            <a:schemeClr val="lt1"/>
-          </a:fontRef>
-        </p:style>
-        <p:txBody>
-          <a:bodyPr rtlCol="0" anchor="ctr"/>
-          <a:lstStyle/>
-          <a:p>
-            <a:pPr algn="ctr"/>
-          </a:p>
-        </p:txBody>
-      </p:sp>
-      <p:sp>
-        <p:nvSpPr>
-          <p:cNvPr id="19" name="TextBox 18"/>
-          <p:cNvSpPr txBox="1"/>
-          <p:nvPr/>
-        </p:nvSpPr>
-        <p:spPr>
-          <a:xfrm>
-            <a:off x="594360" y="4009643"/>
-            <a:ext cx="438912" cy="438912"/>
-          </a:xfrm>
-          <a:prstGeom prst="rect">
-            <a:avLst/>
-          </a:prstGeom>
-          <a:noFill/>
-        </p:spPr>
-        <p:txBody>
-          <a:bodyPr wrap="square" anchor="ctr"/>
-          <a:lstStyle/>
-          <a:p>
-            <a:pPr algn="ctr"/>
-            <a:r>
-              <a:rPr sz="1600" b="1" i="0">
-                <a:solidFill>
-                  <a:srgbClr val="FFFFFF"/>
-                </a:solidFill>
-                <a:latin typeface="Calibri"/>
-              </a:rPr>
-              <a:t>4</a:t>
-            </a:r>
-          </a:p>
-        </p:txBody>
-      </p:sp>
-      <p:sp>
-        <p:nvSpPr>
-          <p:cNvPr id="20" name="TextBox 19"/>
-          <p:cNvSpPr txBox="1"/>
-          <p:nvPr/>
-        </p:nvSpPr>
-        <p:spPr>
-          <a:xfrm>
-            <a:off x="1188720" y="3931919"/>
-            <a:ext cx="10271455" cy="612647"/>
-          </a:xfrm>
-          <a:prstGeom prst="rect">
-            <a:avLst/>
-          </a:prstGeom>
-          <a:noFill/>
-        </p:spPr>
-        <p:txBody>
-          <a:bodyPr wrap="square" anchor="ctr"/>
-          <a:lstStyle/>
-          <a:p>
-            <a:r>
-              <a:rPr sz="1500" b="1" i="0">
-                <a:solidFill>
-                  <a:srgbClr val="095292"/>
-                </a:solidFill>
-                <a:latin typeface="Calibri"/>
-              </a:rPr>
-              <a:t>Subir avance intermedio a ExamLab (Talleres) si se pide.</a:t>
-            </a:r>
-          </a:p>
-        </p:txBody>
-      </p:sp>
-      <p:sp>
-        <p:nvSpPr>
-          <p:cNvPr id="21" name="TextBox 20"/>
+          <a:bodyPr wrap="square">
+            <a:spAutoFit/>
+          </a:bodyPr>
+          <a:lstStyle/>
+          <a:p>
+            <a:pPr>
+              <a:spcAft>
+                <a:spcPts val="800"/>
+              </a:spcAft>
+            </a:pPr>
+            <a:r>
+              <a:rPr sz="1600" b="0" i="0">
+                <a:solidFill>
+                  <a:srgbClr val="333333"/>
+                </a:solidFill>
+                <a:latin typeface="Calibri"/>
+              </a:rPr>
+              <a:t>–   Evidencias: ER, DDL, roles, procs, fn, triggers, opt.</a:t>
+            </a:r>
+          </a:p>
+        </p:txBody>
+      </p:sp>
+      <p:sp>
+        <p:nvSpPr>
+          <p:cNvPr id="6" name="TextBox 5"/>
           <p:cNvSpPr txBox="1"/>
           <p:nvPr/>
         </p:nvSpPr>
@@ -4420,7 +3840,7 @@
                 </a:solidFill>
                 <a:latin typeface="Calibri"/>
               </a:rPr>
-              <a:t>Taller PI VetCare — pistas (checklist vacio)</a:t>
+              <a:t>Taller PI VetCare — pasos guiados</a:t>
             </a:r>
           </a:p>
         </p:txBody>
@@ -4433,8 +3853,8 @@
         </p:nvSpPr>
         <p:spPr>
           <a:xfrm>
-            <a:off x="457200" y="1261872"/>
-            <a:ext cx="11277295" cy="566928"/>
+            <a:off x="457200" y="1554480"/>
+            <a:ext cx="11277295" cy="1051560"/>
           </a:xfrm>
           <a:prstGeom prst="roundRect">
             <a:avLst>
@@ -4472,25 +3892,25 @@
       </p:sp>
       <p:sp>
         <p:nvSpPr>
-          <p:cNvPr id="6" name="Rectangle 5"/>
+          <p:cNvPr id="6" name="Rounded Rectangle 5"/>
           <p:cNvSpPr/>
           <p:nvPr/>
         </p:nvSpPr>
         <p:spPr>
           <a:xfrm>
-            <a:off x="640080" y="1408175"/>
-            <a:ext cx="274320" cy="274320"/>
-          </a:xfrm>
-          <a:prstGeom prst="rect">
-            <a:avLst/>
+            <a:off x="594360" y="1860804"/>
+            <a:ext cx="438912" cy="438912"/>
+          </a:xfrm>
+          <a:prstGeom prst="roundRect">
+            <a:avLst>
+              <a:gd name="adj" fmla="val 12000"/>
+            </a:avLst>
           </a:prstGeom>
           <a:solidFill>
-            <a:srgbClr val="FFFFFF"/>
+            <a:srgbClr val="095292"/>
           </a:solidFill>
           <a:ln>
-            <a:solidFill>
-              <a:srgbClr val="333333"/>
-            </a:solidFill>
+            <a:noFill/>
           </a:ln>
         </p:spPr>
         <p:style>
@@ -4517,20 +3937,87 @@
       </p:sp>
       <p:sp>
         <p:nvSpPr>
-          <p:cNvPr id="7" name="Rectangle 6"/>
+          <p:cNvPr id="7" name="TextBox 6"/>
+          <p:cNvSpPr txBox="1"/>
+          <p:nvPr/>
+        </p:nvSpPr>
+        <p:spPr>
+          <a:xfrm>
+            <a:off x="594360" y="1860804"/>
+            <a:ext cx="438912" cy="438912"/>
+          </a:xfrm>
+          <a:prstGeom prst="rect">
+            <a:avLst/>
+          </a:prstGeom>
+          <a:noFill/>
+        </p:spPr>
+        <p:txBody>
+          <a:bodyPr wrap="square" anchor="ctr"/>
+          <a:lstStyle/>
+          <a:p>
+            <a:pPr algn="ctr"/>
+            <a:r>
+              <a:rPr sz="1600" b="1" i="0">
+                <a:solidFill>
+                  <a:srgbClr val="FFFFFF"/>
+                </a:solidFill>
+                <a:latin typeface="Calibri"/>
+              </a:rPr>
+              <a:t>1</a:t>
+            </a:r>
+          </a:p>
+        </p:txBody>
+      </p:sp>
+      <p:sp>
+        <p:nvSpPr>
+          <p:cNvPr id="8" name="TextBox 7"/>
+          <p:cNvSpPr txBox="1"/>
+          <p:nvPr/>
+        </p:nvSpPr>
+        <p:spPr>
+          <a:xfrm>
+            <a:off x="1188720" y="1645920"/>
+            <a:ext cx="10271455" cy="886968"/>
+          </a:xfrm>
+          <a:prstGeom prst="rect">
+            <a:avLst/>
+          </a:prstGeom>
+          <a:noFill/>
+        </p:spPr>
+        <p:txBody>
+          <a:bodyPr wrap="square" anchor="ctr"/>
+          <a:lstStyle/>
+          <a:p>
+            <a:r>
+              <a:rPr sz="1500" b="1" i="0">
+                <a:solidFill>
+                  <a:srgbClr val="095292"/>
+                </a:solidFill>
+                <a:latin typeface="Calibri"/>
+              </a:rPr>
+              <a:t>Completar checklist de avance (si/no/parcial).</a:t>
+            </a:r>
+          </a:p>
+        </p:txBody>
+      </p:sp>
+      <p:sp>
+        <p:nvSpPr>
+          <p:cNvPr id="9" name="Rounded Rectangle 8"/>
           <p:cNvSpPr/>
           <p:nvPr/>
         </p:nvSpPr>
         <p:spPr>
           <a:xfrm>
-            <a:off x="640080" y="1408175"/>
-            <a:ext cx="73152" cy="274320"/>
-          </a:xfrm>
-          <a:prstGeom prst="rect">
-            <a:avLst/>
+            <a:off x="457200" y="2697480"/>
+            <a:ext cx="11277295" cy="1051560"/>
+          </a:xfrm>
+          <a:prstGeom prst="roundRect">
+            <a:avLst>
+              <a:gd name="adj" fmla="val 12000"/>
+            </a:avLst>
           </a:prstGeom>
           <a:solidFill>
-            <a:srgbClr val="269CCB"/>
+            <a:srgbClr val="E8F4FA"/>
           </a:solidFill>
           <a:ln>
             <a:noFill/>
@@ -4560,14 +4047,59 @@
       </p:sp>
       <p:sp>
         <p:nvSpPr>
-          <p:cNvPr id="8" name="TextBox 7"/>
+          <p:cNvPr id="10" name="Rounded Rectangle 9"/>
+          <p:cNvSpPr/>
+          <p:nvPr/>
+        </p:nvSpPr>
+        <p:spPr>
+          <a:xfrm>
+            <a:off x="594360" y="3003804"/>
+            <a:ext cx="438912" cy="438912"/>
+          </a:xfrm>
+          <a:prstGeom prst="roundRect">
+            <a:avLst>
+              <a:gd name="adj" fmla="val 12000"/>
+            </a:avLst>
+          </a:prstGeom>
+          <a:solidFill>
+            <a:srgbClr val="095292"/>
+          </a:solidFill>
+          <a:ln>
+            <a:noFill/>
+          </a:ln>
+        </p:spPr>
+        <p:style>
+          <a:lnRef idx="1">
+            <a:schemeClr val="accent1"/>
+          </a:lnRef>
+          <a:fillRef idx="3">
+            <a:schemeClr val="accent1"/>
+          </a:fillRef>
+          <a:effectRef idx="2">
+            <a:schemeClr val="accent1"/>
+          </a:effectRef>
+          <a:fontRef idx="minor">
+            <a:schemeClr val="lt1"/>
+          </a:fontRef>
+        </p:style>
+        <p:txBody>
+          <a:bodyPr rtlCol="0" anchor="ctr"/>
+          <a:lstStyle/>
+          <a:p>
+            <a:pPr algn="ctr"/>
+          </a:p>
+        </p:txBody>
+      </p:sp>
+      <p:sp>
+        <p:nvSpPr>
+          <p:cNvPr id="11" name="TextBox 10"/>
           <p:cNvSpPr txBox="1"/>
           <p:nvPr/>
         </p:nvSpPr>
         <p:spPr>
           <a:xfrm>
-            <a:off x="1097280" y="1353312"/>
-            <a:ext cx="10362895" cy="402336"/>
+            <a:off x="594360" y="3003804"/>
+            <a:ext cx="438912" cy="438912"/>
           </a:xfrm>
           <a:prstGeom prst="rect">
             <a:avLst/>
@@ -4578,28 +4110,61 @@
           <a:bodyPr wrap="square" anchor="ctr"/>
           <a:lstStyle/>
           <a:p>
-            <a:r>
-              <a:rPr sz="1500" b="0" i="0">
-                <a:solidFill>
-                  <a:srgbClr val="333333"/>
-                </a:solidFill>
-                <a:latin typeface="Calibri"/>
-              </a:rPr>
-              <a:t>□ Si con evidencia?</a:t>
-            </a:r>
-          </a:p>
-        </p:txBody>
-      </p:sp>
-      <p:sp>
-        <p:nvSpPr>
-          <p:cNvPr id="9" name="Rounded Rectangle 8"/>
+            <a:pPr algn="ctr"/>
+            <a:r>
+              <a:rPr sz="1600" b="1" i="0">
+                <a:solidFill>
+                  <a:srgbClr val="FFFFFF"/>
+                </a:solidFill>
+                <a:latin typeface="Calibri"/>
+              </a:rPr>
+              <a:t>2</a:t>
+            </a:r>
+          </a:p>
+        </p:txBody>
+      </p:sp>
+      <p:sp>
+        <p:nvSpPr>
+          <p:cNvPr id="12" name="TextBox 11"/>
+          <p:cNvSpPr txBox="1"/>
+          <p:nvPr/>
+        </p:nvSpPr>
+        <p:spPr>
+          <a:xfrm>
+            <a:off x="1188720" y="2788920"/>
+            <a:ext cx="10271455" cy="886968"/>
+          </a:xfrm>
+          <a:prstGeom prst="rect">
+            <a:avLst/>
+          </a:prstGeom>
+          <a:noFill/>
+        </p:spPr>
+        <p:txBody>
+          <a:bodyPr wrap="square" anchor="ctr"/>
+          <a:lstStyle/>
+          <a:p>
+            <a:r>
+              <a:rPr sz="1500" b="1" i="0">
+                <a:solidFill>
+                  <a:srgbClr val="095292"/>
+                </a:solidFill>
+                <a:latin typeface="Calibri"/>
+              </a:rPr>
+              <a:t>Demo 3-5 min: ER + 1 proc + 1 trigger.</a:t>
+            </a:r>
+          </a:p>
+        </p:txBody>
+      </p:sp>
+      <p:sp>
+        <p:nvSpPr>
+          <p:cNvPr id="13" name="Rounded Rectangle 12"/>
           <p:cNvSpPr/>
           <p:nvPr/>
         </p:nvSpPr>
         <p:spPr>
           <a:xfrm>
-            <a:off x="457200" y="1938528"/>
-            <a:ext cx="11277295" cy="566928"/>
+            <a:off x="457200" y="3840480"/>
+            <a:ext cx="11277295" cy="1051560"/>
           </a:xfrm>
           <a:prstGeom prst="roundRect">
             <a:avLst>
@@ -4637,25 +4202,25 @@
       </p:sp>
       <p:sp>
         <p:nvSpPr>
-          <p:cNvPr id="10" name="Rectangle 9"/>
+          <p:cNvPr id="14" name="Rounded Rectangle 13"/>
           <p:cNvSpPr/>
           <p:nvPr/>
         </p:nvSpPr>
         <p:spPr>
           <a:xfrm>
-            <a:off x="640080" y="2084832"/>
-            <a:ext cx="274320" cy="274320"/>
-          </a:xfrm>
-          <a:prstGeom prst="rect">
-            <a:avLst/>
+            <a:off x="594360" y="4146804"/>
+            <a:ext cx="438912" cy="438912"/>
+          </a:xfrm>
+          <a:prstGeom prst="roundRect">
+            <a:avLst>
+              <a:gd name="adj" fmla="val 12000"/>
+            </a:avLst>
           </a:prstGeom>
           <a:solidFill>
-            <a:srgbClr val="FFFFFF"/>
+            <a:srgbClr val="095292"/>
           </a:solidFill>
           <a:ln>
-            <a:solidFill>
-              <a:srgbClr val="333333"/>
-            </a:solidFill>
+            <a:noFill/>
           </a:ln>
         </p:spPr>
         <p:style>
@@ -4682,20 +4247,87 @@
       </p:sp>
       <p:sp>
         <p:nvSpPr>
-          <p:cNvPr id="11" name="Rectangle 10"/>
+          <p:cNvPr id="15" name="TextBox 14"/>
+          <p:cNvSpPr txBox="1"/>
+          <p:nvPr/>
+        </p:nvSpPr>
+        <p:spPr>
+          <a:xfrm>
+            <a:off x="594360" y="4146804"/>
+            <a:ext cx="438912" cy="438912"/>
+          </a:xfrm>
+          <a:prstGeom prst="rect">
+            <a:avLst/>
+          </a:prstGeom>
+          <a:noFill/>
+        </p:spPr>
+        <p:txBody>
+          <a:bodyPr wrap="square" anchor="ctr"/>
+          <a:lstStyle/>
+          <a:p>
+            <a:pPr algn="ctr"/>
+            <a:r>
+              <a:rPr sz="1600" b="1" i="0">
+                <a:solidFill>
+                  <a:srgbClr val="FFFFFF"/>
+                </a:solidFill>
+                <a:latin typeface="Calibri"/>
+              </a:rPr>
+              <a:t>3</a:t>
+            </a:r>
+          </a:p>
+        </p:txBody>
+      </p:sp>
+      <p:sp>
+        <p:nvSpPr>
+          <p:cNvPr id="16" name="TextBox 15"/>
+          <p:cNvSpPr txBox="1"/>
+          <p:nvPr/>
+        </p:nvSpPr>
+        <p:spPr>
+          <a:xfrm>
+            <a:off x="1188720" y="3931920"/>
+            <a:ext cx="10271455" cy="886968"/>
+          </a:xfrm>
+          <a:prstGeom prst="rect">
+            <a:avLst/>
+          </a:prstGeom>
+          <a:noFill/>
+        </p:spPr>
+        <p:txBody>
+          <a:bodyPr wrap="square" anchor="ctr"/>
+          <a:lstStyle/>
+          <a:p>
+            <a:r>
+              <a:rPr sz="1500" b="1" i="0">
+                <a:solidFill>
+                  <a:srgbClr val="095292"/>
+                </a:solidFill>
+                <a:latin typeface="Calibri"/>
+              </a:rPr>
+              <a:t>Lista de gaps con responsable.</a:t>
+            </a:r>
+          </a:p>
+        </p:txBody>
+      </p:sp>
+      <p:sp>
+        <p:nvSpPr>
+          <p:cNvPr id="17" name="Rounded Rectangle 16"/>
           <p:cNvSpPr/>
           <p:nvPr/>
         </p:nvSpPr>
         <p:spPr>
           <a:xfrm>
-            <a:off x="640080" y="2084832"/>
-            <a:ext cx="73152" cy="274320"/>
-          </a:xfrm>
-          <a:prstGeom prst="rect">
-            <a:avLst/>
+            <a:off x="457200" y="4983480"/>
+            <a:ext cx="11277295" cy="1051560"/>
+          </a:xfrm>
+          <a:prstGeom prst="roundRect">
+            <a:avLst>
+              <a:gd name="adj" fmla="val 12000"/>
+            </a:avLst>
           </a:prstGeom>
           <a:solidFill>
-            <a:srgbClr val="269CCB"/>
+            <a:srgbClr val="E8F4FA"/>
           </a:solidFill>
           <a:ln>
             <a:noFill/>
@@ -4725,46 +4357,14 @@
       </p:sp>
       <p:sp>
         <p:nvSpPr>
-          <p:cNvPr id="12" name="TextBox 11"/>
-          <p:cNvSpPr txBox="1"/>
-          <p:nvPr/>
-        </p:nvSpPr>
-        <p:spPr>
-          <a:xfrm>
-            <a:off x="1097280" y="2029968"/>
-            <a:ext cx="10362895" cy="402336"/>
-          </a:xfrm>
-          <a:prstGeom prst="rect">
-            <a:avLst/>
-          </a:prstGeom>
-          <a:noFill/>
-        </p:spPr>
-        <p:txBody>
-          <a:bodyPr wrap="square" anchor="ctr"/>
-          <a:lstStyle/>
-          <a:p>
-            <a:r>
-              <a:rPr sz="1500" b="0" i="0">
-                <a:solidFill>
-                  <a:srgbClr val="333333"/>
-                </a:solidFill>
-                <a:latin typeface="Calibri"/>
-              </a:rPr>
-              <a:t>□ Gaps con dueño?</a:t>
-            </a:r>
-          </a:p>
-        </p:txBody>
-      </p:sp>
-      <p:sp>
-        <p:nvSpPr>
-          <p:cNvPr id="13" name="Rounded Rectangle 12"/>
+          <p:cNvPr id="18" name="Rounded Rectangle 17"/>
           <p:cNvSpPr/>
           <p:nvPr/>
         </p:nvSpPr>
         <p:spPr>
           <a:xfrm>
-            <a:off x="457200" y="2615184"/>
-            <a:ext cx="11277295" cy="566928"/>
+            <a:off x="594360" y="5289804"/>
+            <a:ext cx="438912" cy="438912"/>
           </a:xfrm>
           <a:prstGeom prst="roundRect">
             <a:avLst>
@@ -4772,7 +4372,7 @@
             </a:avLst>
           </a:prstGeom>
           <a:solidFill>
-            <a:srgbClr val="F2F2F2"/>
+            <a:srgbClr val="095292"/>
           </a:solidFill>
           <a:ln>
             <a:noFill/>
@@ -4802,102 +4402,47 @@
       </p:sp>
       <p:sp>
         <p:nvSpPr>
-          <p:cNvPr id="14" name="Rectangle 13"/>
-          <p:cNvSpPr/>
-          <p:nvPr/>
-        </p:nvSpPr>
-        <p:spPr>
-          <a:xfrm>
-            <a:off x="640080" y="2761488"/>
-            <a:ext cx="274320" cy="274320"/>
-          </a:xfrm>
-          <a:prstGeom prst="rect">
-            <a:avLst/>
-          </a:prstGeom>
-          <a:solidFill>
-            <a:srgbClr val="FFFFFF"/>
-          </a:solidFill>
-          <a:ln>
-            <a:solidFill>
-              <a:srgbClr val="333333"/>
-            </a:solidFill>
-          </a:ln>
-        </p:spPr>
-        <p:style>
-          <a:lnRef idx="1">
-            <a:schemeClr val="accent1"/>
-          </a:lnRef>
-          <a:fillRef idx="3">
-            <a:schemeClr val="accent1"/>
-          </a:fillRef>
-          <a:effectRef idx="2">
-            <a:schemeClr val="accent1"/>
-          </a:effectRef>
-          <a:fontRef idx="minor">
-            <a:schemeClr val="lt1"/>
-          </a:fontRef>
-        </p:style>
-        <p:txBody>
-          <a:bodyPr rtlCol="0" anchor="ctr"/>
+          <p:cNvPr id="19" name="TextBox 18"/>
+          <p:cNvSpPr txBox="1"/>
+          <p:nvPr/>
+        </p:nvSpPr>
+        <p:spPr>
+          <a:xfrm>
+            <a:off x="594360" y="5289804"/>
+            <a:ext cx="438912" cy="438912"/>
+          </a:xfrm>
+          <a:prstGeom prst="rect">
+            <a:avLst/>
+          </a:prstGeom>
+          <a:noFill/>
+        </p:spPr>
+        <p:txBody>
+          <a:bodyPr wrap="square" anchor="ctr"/>
           <a:lstStyle/>
           <a:p>
             <a:pPr algn="ctr"/>
-          </a:p>
-        </p:txBody>
-      </p:sp>
-      <p:sp>
-        <p:nvSpPr>
-          <p:cNvPr id="15" name="Rectangle 14"/>
-          <p:cNvSpPr/>
-          <p:nvPr/>
-        </p:nvSpPr>
-        <p:spPr>
-          <a:xfrm>
-            <a:off x="640080" y="2761488"/>
-            <a:ext cx="73152" cy="274320"/>
-          </a:xfrm>
-          <a:prstGeom prst="rect">
-            <a:avLst/>
-          </a:prstGeom>
-          <a:solidFill>
-            <a:srgbClr val="269CCB"/>
-          </a:solidFill>
-          <a:ln>
-            <a:noFill/>
-          </a:ln>
-        </p:spPr>
-        <p:style>
-          <a:lnRef idx="1">
-            <a:schemeClr val="accent1"/>
-          </a:lnRef>
-          <a:fillRef idx="3">
-            <a:schemeClr val="accent1"/>
-          </a:fillRef>
-          <a:effectRef idx="2">
-            <a:schemeClr val="accent1"/>
-          </a:effectRef>
-          <a:fontRef idx="minor">
-            <a:schemeClr val="lt1"/>
-          </a:fontRef>
-        </p:style>
-        <p:txBody>
-          <a:bodyPr rtlCol="0" anchor="ctr"/>
-          <a:lstStyle/>
-          <a:p>
-            <a:pPr algn="ctr"/>
-          </a:p>
-        </p:txBody>
-      </p:sp>
-      <p:sp>
-        <p:nvSpPr>
-          <p:cNvPr id="16" name="TextBox 15"/>
+            <a:r>
+              <a:rPr sz="1600" b="1" i="0">
+                <a:solidFill>
+                  <a:srgbClr val="FFFFFF"/>
+                </a:solidFill>
+                <a:latin typeface="Calibri"/>
+              </a:rPr>
+              <a:t>4</a:t>
+            </a:r>
+          </a:p>
+        </p:txBody>
+      </p:sp>
+      <p:sp>
+        <p:nvSpPr>
+          <p:cNvPr id="20" name="TextBox 19"/>
           <p:cNvSpPr txBox="1"/>
           <p:nvPr/>
         </p:nvSpPr>
         <p:spPr>
           <a:xfrm>
-            <a:off x="1097280" y="2706624"/>
-            <a:ext cx="10362895" cy="402336"/>
+            <a:off x="1188720" y="5074920"/>
+            <a:ext cx="10271455" cy="886968"/>
           </a:xfrm>
           <a:prstGeom prst="rect">
             <a:avLst/>
@@ -4909,20 +4454,20 @@
           <a:lstStyle/>
           <a:p>
             <a:r>
-              <a:rPr sz="1500" b="0" i="0">
-                <a:solidFill>
-                  <a:srgbClr val="333333"/>
-                </a:solidFill>
-                <a:latin typeface="Calibri"/>
-              </a:rPr>
-              <a:t>□ Demo &lt;=5 min?</a:t>
-            </a:r>
-          </a:p>
-        </p:txBody>
-      </p:sp>
-      <p:sp>
-        <p:nvSpPr>
-          <p:cNvPr id="17" name="TextBox 16"/>
+              <a:rPr sz="1500" b="1" i="0">
+                <a:solidFill>
+                  <a:srgbClr val="095292"/>
+                </a:solidFill>
+                <a:latin typeface="Calibri"/>
+              </a:rPr>
+              <a:t>Subir avance intermedio a ExamLab (Talleres) si se pide.</a:t>
+            </a:r>
+          </a:p>
+        </p:txBody>
+      </p:sp>
+      <p:sp>
+        <p:nvSpPr>
+          <p:cNvPr id="21" name="TextBox 20"/>
           <p:cNvSpPr txBox="1"/>
           <p:nvPr/>
         </p:nvSpPr>
@@ -5096,21 +4641,154 @@
                 </a:solidFill>
                 <a:latin typeface="Calibri"/>
               </a:rPr>
-              <a:t>Criterios de exito / entregable</a:t>
-            </a:r>
-          </a:p>
-        </p:txBody>
-      </p:sp>
-      <p:sp>
-        <p:nvSpPr>
-          <p:cNvPr id="5" name="TextBox 4"/>
+              <a:t>Taller PI VetCare — pistas (checklist vacio)</a:t>
+            </a:r>
+          </a:p>
+        </p:txBody>
+      </p:sp>
+      <p:sp>
+        <p:nvSpPr>
+          <p:cNvPr id="5" name="Rounded Rectangle 4"/>
+          <p:cNvSpPr/>
+          <p:nvPr/>
+        </p:nvSpPr>
+        <p:spPr>
+          <a:xfrm>
+            <a:off x="457200" y="1261872"/>
+            <a:ext cx="11277295" cy="566928"/>
+          </a:xfrm>
+          <a:prstGeom prst="roundRect">
+            <a:avLst>
+              <a:gd name="adj" fmla="val 12000"/>
+            </a:avLst>
+          </a:prstGeom>
+          <a:solidFill>
+            <a:srgbClr val="F2F2F2"/>
+          </a:solidFill>
+          <a:ln>
+            <a:noFill/>
+          </a:ln>
+        </p:spPr>
+        <p:style>
+          <a:lnRef idx="1">
+            <a:schemeClr val="accent1"/>
+          </a:lnRef>
+          <a:fillRef idx="3">
+            <a:schemeClr val="accent1"/>
+          </a:fillRef>
+          <a:effectRef idx="2">
+            <a:schemeClr val="accent1"/>
+          </a:effectRef>
+          <a:fontRef idx="minor">
+            <a:schemeClr val="lt1"/>
+          </a:fontRef>
+        </p:style>
+        <p:txBody>
+          <a:bodyPr rtlCol="0" anchor="ctr"/>
+          <a:lstStyle/>
+          <a:p>
+            <a:pPr algn="ctr"/>
+          </a:p>
+        </p:txBody>
+      </p:sp>
+      <p:sp>
+        <p:nvSpPr>
+          <p:cNvPr id="6" name="Rectangle 5"/>
+          <p:cNvSpPr/>
+          <p:nvPr/>
+        </p:nvSpPr>
+        <p:spPr>
+          <a:xfrm>
+            <a:off x="640080" y="1408175"/>
+            <a:ext cx="274320" cy="274320"/>
+          </a:xfrm>
+          <a:prstGeom prst="rect">
+            <a:avLst/>
+          </a:prstGeom>
+          <a:solidFill>
+            <a:srgbClr val="FFFFFF"/>
+          </a:solidFill>
+          <a:ln>
+            <a:solidFill>
+              <a:srgbClr val="333333"/>
+            </a:solidFill>
+          </a:ln>
+        </p:spPr>
+        <p:style>
+          <a:lnRef idx="1">
+            <a:schemeClr val="accent1"/>
+          </a:lnRef>
+          <a:fillRef idx="3">
+            <a:schemeClr val="accent1"/>
+          </a:fillRef>
+          <a:effectRef idx="2">
+            <a:schemeClr val="accent1"/>
+          </a:effectRef>
+          <a:fontRef idx="minor">
+            <a:schemeClr val="lt1"/>
+          </a:fontRef>
+        </p:style>
+        <p:txBody>
+          <a:bodyPr rtlCol="0" anchor="ctr"/>
+          <a:lstStyle/>
+          <a:p>
+            <a:pPr algn="ctr"/>
+          </a:p>
+        </p:txBody>
+      </p:sp>
+      <p:sp>
+        <p:nvSpPr>
+          <p:cNvPr id="7" name="Rectangle 6"/>
+          <p:cNvSpPr/>
+          <p:nvPr/>
+        </p:nvSpPr>
+        <p:spPr>
+          <a:xfrm>
+            <a:off x="640080" y="1408175"/>
+            <a:ext cx="73152" cy="274320"/>
+          </a:xfrm>
+          <a:prstGeom prst="rect">
+            <a:avLst/>
+          </a:prstGeom>
+          <a:solidFill>
+            <a:srgbClr val="269CCB"/>
+          </a:solidFill>
+          <a:ln>
+            <a:noFill/>
+          </a:ln>
+        </p:spPr>
+        <p:style>
+          <a:lnRef idx="1">
+            <a:schemeClr val="accent1"/>
+          </a:lnRef>
+          <a:fillRef idx="3">
+            <a:schemeClr val="accent1"/>
+          </a:fillRef>
+          <a:effectRef idx="2">
+            <a:schemeClr val="accent1"/>
+          </a:effectRef>
+          <a:fontRef idx="minor">
+            <a:schemeClr val="lt1"/>
+          </a:fontRef>
+        </p:style>
+        <p:txBody>
+          <a:bodyPr rtlCol="0" anchor="ctr"/>
+          <a:lstStyle/>
+          <a:p>
+            <a:pPr algn="ctr"/>
+          </a:p>
+        </p:txBody>
+      </p:sp>
+      <p:sp>
+        <p:nvSpPr>
+          <p:cNvPr id="8" name="TextBox 7"/>
           <p:cNvSpPr txBox="1"/>
           <p:nvPr/>
         </p:nvSpPr>
         <p:spPr>
           <a:xfrm>
-            <a:off x="457200" y="1170432"/>
-            <a:ext cx="11277295" cy="5230368"/>
+            <a:off x="1097280" y="1353312"/>
+            <a:ext cx="10362895" cy="402336"/>
           </a:xfrm>
           <a:prstGeom prst="rect">
             <a:avLst/>
@@ -5118,115 +4796,354 @@
           <a:noFill/>
         </p:spPr>
         <p:txBody>
-          <a:bodyPr wrap="square">
-            <a:spAutoFit/>
-          </a:bodyPr>
-          <a:lstStyle/>
-          <a:p>
-            <a:pPr>
-              <a:spcAft>
-                <a:spcPts val="800"/>
-              </a:spcAft>
-            </a:pPr>
-            <a:r>
-              <a:rPr sz="1600" b="0" i="0">
+          <a:bodyPr wrap="square" anchor="ctr"/>
+          <a:lstStyle/>
+          <a:p>
+            <a:r>
+              <a:rPr sz="1500" b="0" i="0">
                 <a:solidFill>
                   <a:srgbClr val="333333"/>
                 </a:solidFill>
                 <a:latin typeface="Calibri"/>
               </a:rPr>
-              <a:t>–   </a:t>
-            </a:r>
-            <a:r>
-              <a:rPr sz="1600" b="1" i="0">
+              <a:t>□ Si con evidencia?</a:t>
+            </a:r>
+          </a:p>
+        </p:txBody>
+      </p:sp>
+      <p:sp>
+        <p:nvSpPr>
+          <p:cNvPr id="9" name="Rounded Rectangle 8"/>
+          <p:cNvSpPr/>
+          <p:nvPr/>
+        </p:nvSpPr>
+        <p:spPr>
+          <a:xfrm>
+            <a:off x="457200" y="1938528"/>
+            <a:ext cx="11277295" cy="566928"/>
+          </a:xfrm>
+          <a:prstGeom prst="roundRect">
+            <a:avLst>
+              <a:gd name="adj" fmla="val 12000"/>
+            </a:avLst>
+          </a:prstGeom>
+          <a:solidFill>
+            <a:srgbClr val="F2F2F2"/>
+          </a:solidFill>
+          <a:ln>
+            <a:noFill/>
+          </a:ln>
+        </p:spPr>
+        <p:style>
+          <a:lnRef idx="1">
+            <a:schemeClr val="accent1"/>
+          </a:lnRef>
+          <a:fillRef idx="3">
+            <a:schemeClr val="accent1"/>
+          </a:fillRef>
+          <a:effectRef idx="2">
+            <a:schemeClr val="accent1"/>
+          </a:effectRef>
+          <a:fontRef idx="minor">
+            <a:schemeClr val="lt1"/>
+          </a:fontRef>
+        </p:style>
+        <p:txBody>
+          <a:bodyPr rtlCol="0" anchor="ctr"/>
+          <a:lstStyle/>
+          <a:p>
+            <a:pPr algn="ctr"/>
+          </a:p>
+        </p:txBody>
+      </p:sp>
+      <p:sp>
+        <p:nvSpPr>
+          <p:cNvPr id="10" name="Rectangle 9"/>
+          <p:cNvSpPr/>
+          <p:nvPr/>
+        </p:nvSpPr>
+        <p:spPr>
+          <a:xfrm>
+            <a:off x="640080" y="2084832"/>
+            <a:ext cx="274320" cy="274320"/>
+          </a:xfrm>
+          <a:prstGeom prst="rect">
+            <a:avLst/>
+          </a:prstGeom>
+          <a:solidFill>
+            <a:srgbClr val="FFFFFF"/>
+          </a:solidFill>
+          <a:ln>
+            <a:solidFill>
+              <a:srgbClr val="333333"/>
+            </a:solidFill>
+          </a:ln>
+        </p:spPr>
+        <p:style>
+          <a:lnRef idx="1">
+            <a:schemeClr val="accent1"/>
+          </a:lnRef>
+          <a:fillRef idx="3">
+            <a:schemeClr val="accent1"/>
+          </a:fillRef>
+          <a:effectRef idx="2">
+            <a:schemeClr val="accent1"/>
+          </a:effectRef>
+          <a:fontRef idx="minor">
+            <a:schemeClr val="lt1"/>
+          </a:fontRef>
+        </p:style>
+        <p:txBody>
+          <a:bodyPr rtlCol="0" anchor="ctr"/>
+          <a:lstStyle/>
+          <a:p>
+            <a:pPr algn="ctr"/>
+          </a:p>
+        </p:txBody>
+      </p:sp>
+      <p:sp>
+        <p:nvSpPr>
+          <p:cNvPr id="11" name="Rectangle 10"/>
+          <p:cNvSpPr/>
+          <p:nvPr/>
+        </p:nvSpPr>
+        <p:spPr>
+          <a:xfrm>
+            <a:off x="640080" y="2084832"/>
+            <a:ext cx="73152" cy="274320"/>
+          </a:xfrm>
+          <a:prstGeom prst="rect">
+            <a:avLst/>
+          </a:prstGeom>
+          <a:solidFill>
+            <a:srgbClr val="269CCB"/>
+          </a:solidFill>
+          <a:ln>
+            <a:noFill/>
+          </a:ln>
+        </p:spPr>
+        <p:style>
+          <a:lnRef idx="1">
+            <a:schemeClr val="accent1"/>
+          </a:lnRef>
+          <a:fillRef idx="3">
+            <a:schemeClr val="accent1"/>
+          </a:fillRef>
+          <a:effectRef idx="2">
+            <a:schemeClr val="accent1"/>
+          </a:effectRef>
+          <a:fontRef idx="minor">
+            <a:schemeClr val="lt1"/>
+          </a:fontRef>
+        </p:style>
+        <p:txBody>
+          <a:bodyPr rtlCol="0" anchor="ctr"/>
+          <a:lstStyle/>
+          <a:p>
+            <a:pPr algn="ctr"/>
+          </a:p>
+        </p:txBody>
+      </p:sp>
+      <p:sp>
+        <p:nvSpPr>
+          <p:cNvPr id="12" name="TextBox 11"/>
+          <p:cNvSpPr txBox="1"/>
+          <p:nvPr/>
+        </p:nvSpPr>
+        <p:spPr>
+          <a:xfrm>
+            <a:off x="1097280" y="2029968"/>
+            <a:ext cx="10362895" cy="402336"/>
+          </a:xfrm>
+          <a:prstGeom prst="rect">
+            <a:avLst/>
+          </a:prstGeom>
+          <a:noFill/>
+        </p:spPr>
+        <p:txBody>
+          <a:bodyPr wrap="square" anchor="ctr"/>
+          <a:lstStyle/>
+          <a:p>
+            <a:r>
+              <a:rPr sz="1500" b="0" i="0">
                 <a:solidFill>
                   <a:srgbClr val="333333"/>
                 </a:solidFill>
                 <a:latin typeface="Calibri"/>
               </a:rPr>
-              <a:t>Entregable:</a:t>
-            </a:r>
-            <a:r>
-              <a:rPr sz="1600" b="0" i="0">
+              <a:t>□ Gaps con dueño?</a:t>
+            </a:r>
+          </a:p>
+        </p:txBody>
+      </p:sp>
+      <p:sp>
+        <p:nvSpPr>
+          <p:cNvPr id="13" name="Rounded Rectangle 12"/>
+          <p:cNvSpPr/>
+          <p:nvPr/>
+        </p:nvSpPr>
+        <p:spPr>
+          <a:xfrm>
+            <a:off x="457200" y="2615184"/>
+            <a:ext cx="11277295" cy="566928"/>
+          </a:xfrm>
+          <a:prstGeom prst="roundRect">
+            <a:avLst>
+              <a:gd name="adj" fmla="val 12000"/>
+            </a:avLst>
+          </a:prstGeom>
+          <a:solidFill>
+            <a:srgbClr val="F2F2F2"/>
+          </a:solidFill>
+          <a:ln>
+            <a:noFill/>
+          </a:ln>
+        </p:spPr>
+        <p:style>
+          <a:lnRef idx="1">
+            <a:schemeClr val="accent1"/>
+          </a:lnRef>
+          <a:fillRef idx="3">
+            <a:schemeClr val="accent1"/>
+          </a:fillRef>
+          <a:effectRef idx="2">
+            <a:schemeClr val="accent1"/>
+          </a:effectRef>
+          <a:fontRef idx="minor">
+            <a:schemeClr val="lt1"/>
+          </a:fontRef>
+        </p:style>
+        <p:txBody>
+          <a:bodyPr rtlCol="0" anchor="ctr"/>
+          <a:lstStyle/>
+          <a:p>
+            <a:pPr algn="ctr"/>
+          </a:p>
+        </p:txBody>
+      </p:sp>
+      <p:sp>
+        <p:nvSpPr>
+          <p:cNvPr id="14" name="Rectangle 13"/>
+          <p:cNvSpPr/>
+          <p:nvPr/>
+        </p:nvSpPr>
+        <p:spPr>
+          <a:xfrm>
+            <a:off x="640080" y="2761488"/>
+            <a:ext cx="274320" cy="274320"/>
+          </a:xfrm>
+          <a:prstGeom prst="rect">
+            <a:avLst/>
+          </a:prstGeom>
+          <a:solidFill>
+            <a:srgbClr val="FFFFFF"/>
+          </a:solidFill>
+          <a:ln>
+            <a:solidFill>
+              <a:srgbClr val="333333"/>
+            </a:solidFill>
+          </a:ln>
+        </p:spPr>
+        <p:style>
+          <a:lnRef idx="1">
+            <a:schemeClr val="accent1"/>
+          </a:lnRef>
+          <a:fillRef idx="3">
+            <a:schemeClr val="accent1"/>
+          </a:fillRef>
+          <a:effectRef idx="2">
+            <a:schemeClr val="accent1"/>
+          </a:effectRef>
+          <a:fontRef idx="minor">
+            <a:schemeClr val="lt1"/>
+          </a:fontRef>
+        </p:style>
+        <p:txBody>
+          <a:bodyPr rtlCol="0" anchor="ctr"/>
+          <a:lstStyle/>
+          <a:p>
+            <a:pPr algn="ctr"/>
+          </a:p>
+        </p:txBody>
+      </p:sp>
+      <p:sp>
+        <p:nvSpPr>
+          <p:cNvPr id="15" name="Rectangle 14"/>
+          <p:cNvSpPr/>
+          <p:nvPr/>
+        </p:nvSpPr>
+        <p:spPr>
+          <a:xfrm>
+            <a:off x="640080" y="2761488"/>
+            <a:ext cx="73152" cy="274320"/>
+          </a:xfrm>
+          <a:prstGeom prst="rect">
+            <a:avLst/>
+          </a:prstGeom>
+          <a:solidFill>
+            <a:srgbClr val="269CCB"/>
+          </a:solidFill>
+          <a:ln>
+            <a:noFill/>
+          </a:ln>
+        </p:spPr>
+        <p:style>
+          <a:lnRef idx="1">
+            <a:schemeClr val="accent1"/>
+          </a:lnRef>
+          <a:fillRef idx="3">
+            <a:schemeClr val="accent1"/>
+          </a:fillRef>
+          <a:effectRef idx="2">
+            <a:schemeClr val="accent1"/>
+          </a:effectRef>
+          <a:fontRef idx="minor">
+            <a:schemeClr val="lt1"/>
+          </a:fontRef>
+        </p:style>
+        <p:txBody>
+          <a:bodyPr rtlCol="0" anchor="ctr"/>
+          <a:lstStyle/>
+          <a:p>
+            <a:pPr algn="ctr"/>
+          </a:p>
+        </p:txBody>
+      </p:sp>
+      <p:sp>
+        <p:nvSpPr>
+          <p:cNvPr id="16" name="TextBox 15"/>
+          <p:cNvSpPr txBox="1"/>
+          <p:nvPr/>
+        </p:nvSpPr>
+        <p:spPr>
+          <a:xfrm>
+            <a:off x="1097280" y="2706624"/>
+            <a:ext cx="10362895" cy="402336"/>
+          </a:xfrm>
+          <a:prstGeom prst="rect">
+            <a:avLst/>
+          </a:prstGeom>
+          <a:noFill/>
+        </p:spPr>
+        <p:txBody>
+          <a:bodyPr wrap="square" anchor="ctr"/>
+          <a:lstStyle/>
+          <a:p>
+            <a:r>
+              <a:rPr sz="1500" b="0" i="0">
                 <a:solidFill>
                   <a:srgbClr val="333333"/>
                 </a:solidFill>
                 <a:latin typeface="Calibri"/>
               </a:rPr>
-              <a:t> Checklist firmada + enlace/ZIP avance (DDL+procs+ER)</a:t>
-            </a:r>
-          </a:p>
-          <a:p>
-            <a:pPr>
-              <a:spcAft>
-                <a:spcPts val="800"/>
-              </a:spcAft>
-            </a:pPr>
-            <a:r>
-              <a:rPr sz="1600" b="0" i="0">
-                <a:solidFill>
-                  <a:srgbClr val="333333"/>
-                </a:solidFill>
-                <a:latin typeface="Calibri"/>
-              </a:rPr>
-              <a:t>–   Evidencia en playground (enlace) o archivo SQL/PNG propio.</a:t>
-            </a:r>
-          </a:p>
-          <a:p>
-            <a:pPr>
-              <a:spcAft>
-                <a:spcPts val="800"/>
-              </a:spcAft>
-            </a:pPr>
-            <a:r>
-              <a:rPr sz="1600" b="0" i="0">
-                <a:solidFill>
-                  <a:srgbClr val="333333"/>
-                </a:solidFill>
-                <a:latin typeface="Calibri"/>
-              </a:rPr>
-              <a:t>–   Actualizar checklist PI (que criterio de rubrica avanzo).</a:t>
-            </a:r>
-          </a:p>
-          <a:p>
-            <a:pPr>
-              <a:spcAft>
-                <a:spcPts val="800"/>
-              </a:spcAft>
-            </a:pPr>
-            <a:r>
-              <a:rPr sz="1600" b="0" i="0">
-                <a:solidFill>
-                  <a:srgbClr val="333333"/>
-                </a:solidFill>
-                <a:latin typeface="Calibri"/>
-              </a:rPr>
-              <a:t>–   </a:t>
-            </a:r>
-            <a:r>
-              <a:rPr sz="1600" b="1" i="0">
-                <a:solidFill>
-                  <a:srgbClr val="333333"/>
-                </a:solidFill>
-                <a:latin typeface="Calibri"/>
-              </a:rPr>
-              <a:t>Entrega en ExamLab</a:t>
-            </a:r>
-            <a:r>
-              <a:rPr sz="1600" b="0" i="0">
-                <a:solidFill>
-                  <a:srgbClr val="333333"/>
-                </a:solidFill>
-                <a:latin typeface="Calibri"/>
-              </a:rPr>
-              <a:t> (https://uniaj.examlab.workers.dev/) — domingo 23:59 cuando aplique taller.</a:t>
-            </a:r>
-          </a:p>
-        </p:txBody>
-      </p:sp>
-      <p:sp>
-        <p:nvSpPr>
-          <p:cNvPr id="6" name="TextBox 5"/>
+              <a:t>□ Demo &lt;=5 min?</a:t>
+            </a:r>
+          </a:p>
+        </p:txBody>
+      </p:sp>
+      <p:sp>
+        <p:nvSpPr>
+          <p:cNvPr id="17" name="TextBox 16"/>
           <p:cNvSpPr txBox="1"/>
           <p:nvPr/>
         </p:nvSpPr>
@@ -5400,109 +5317,21 @@
                 </a:solidFill>
                 <a:latin typeface="Calibri"/>
               </a:rPr>
-              <a:t>Para el PI esta semana</a:t>
-            </a:r>
-          </a:p>
-        </p:txBody>
-      </p:sp>
-      <p:sp>
-        <p:nvSpPr>
-          <p:cNvPr id="5" name="Rounded Rectangle 4"/>
-          <p:cNvSpPr/>
-          <p:nvPr/>
-        </p:nvSpPr>
-        <p:spPr>
-          <a:xfrm>
-            <a:off x="457200" y="1261872"/>
-            <a:ext cx="11277295" cy="1051560"/>
-          </a:xfrm>
-          <a:prstGeom prst="roundRect">
-            <a:avLst>
-              <a:gd name="adj" fmla="val 12000"/>
-            </a:avLst>
-          </a:prstGeom>
-          <a:solidFill>
-            <a:srgbClr val="E8F4FA"/>
-          </a:solidFill>
-          <a:ln>
-            <a:noFill/>
-          </a:ln>
-        </p:spPr>
-        <p:style>
-          <a:lnRef idx="1">
-            <a:schemeClr val="accent1"/>
-          </a:lnRef>
-          <a:fillRef idx="3">
-            <a:schemeClr val="accent1"/>
-          </a:fillRef>
-          <a:effectRef idx="2">
-            <a:schemeClr val="accent1"/>
-          </a:effectRef>
-          <a:fontRef idx="minor">
-            <a:schemeClr val="lt1"/>
-          </a:fontRef>
-        </p:style>
-        <p:txBody>
-          <a:bodyPr rtlCol="0" anchor="ctr"/>
-          <a:lstStyle/>
-          <a:p>
-            <a:pPr algn="ctr"/>
-          </a:p>
-        </p:txBody>
-      </p:sp>
-      <p:sp>
-        <p:nvSpPr>
-          <p:cNvPr id="6" name="Rectangle 5"/>
-          <p:cNvSpPr/>
-          <p:nvPr/>
-        </p:nvSpPr>
-        <p:spPr>
-          <a:xfrm>
-            <a:off x="457200" y="1261872"/>
-            <a:ext cx="128016" cy="1051560"/>
-          </a:xfrm>
-          <a:prstGeom prst="rect">
-            <a:avLst/>
-          </a:prstGeom>
-          <a:solidFill>
-            <a:srgbClr val="269CCB"/>
-          </a:solidFill>
-          <a:ln>
-            <a:noFill/>
-          </a:ln>
-        </p:spPr>
-        <p:style>
-          <a:lnRef idx="1">
-            <a:schemeClr val="accent1"/>
-          </a:lnRef>
-          <a:fillRef idx="3">
-            <a:schemeClr val="accent1"/>
-          </a:fillRef>
-          <a:effectRef idx="2">
-            <a:schemeClr val="accent1"/>
-          </a:effectRef>
-          <a:fontRef idx="minor">
-            <a:schemeClr val="lt1"/>
-          </a:fontRef>
-        </p:style>
-        <p:txBody>
-          <a:bodyPr rtlCol="0" anchor="ctr"/>
-          <a:lstStyle/>
-          <a:p>
-            <a:pPr algn="ctr"/>
-          </a:p>
-        </p:txBody>
-      </p:sp>
-      <p:sp>
-        <p:nvSpPr>
-          <p:cNvPr id="7" name="TextBox 6"/>
+              <a:t>Criterios de exito / entregable</a:t>
+            </a:r>
+          </a:p>
+        </p:txBody>
+      </p:sp>
+      <p:sp>
+        <p:nvSpPr>
+          <p:cNvPr id="5" name="TextBox 4"/>
           <p:cNvSpPr txBox="1"/>
           <p:nvPr/>
         </p:nvSpPr>
         <p:spPr>
           <a:xfrm>
-            <a:off x="777240" y="1399031"/>
-            <a:ext cx="10774375" cy="822959"/>
+            <a:off x="457200" y="1170432"/>
+            <a:ext cx="11277295" cy="5230368"/>
           </a:xfrm>
           <a:prstGeom prst="rect">
             <a:avLst/>
@@ -5515,313 +5344,110 @@
           </a:bodyPr>
           <a:lstStyle/>
           <a:p>
-            <a:r>
-              <a:rPr sz="1200" b="1" i="0">
-                <a:solidFill>
-                  <a:srgbClr val="269CCB"/>
-                </a:solidFill>
-                <a:latin typeface="Calibri"/>
-              </a:rPr>
-              <a:t>Info</a:t>
-            </a:r>
-          </a:p>
-          <a:p>
             <a:pPr>
-              <a:spcBef>
-                <a:spcPts val="400"/>
-              </a:spcBef>
+              <a:spcAft>
+                <a:spcPts val="800"/>
+              </a:spcAft>
             </a:pPr>
             <a:r>
-              <a:rPr sz="1400" b="0" i="0">
+              <a:rPr sz="1600" b="0" i="0">
                 <a:solidFill>
                   <a:srgbClr val="333333"/>
                 </a:solidFill>
                 <a:latin typeface="Calibri"/>
               </a:rPr>
-              <a:t>Hito: Demo parcial + checklist de avance (hito formal PI)</a:t>
-            </a:r>
-          </a:p>
-        </p:txBody>
-      </p:sp>
-      <p:sp>
-        <p:nvSpPr>
-          <p:cNvPr id="8" name="Rounded Rectangle 7"/>
-          <p:cNvSpPr/>
-          <p:nvPr/>
-        </p:nvSpPr>
-        <p:spPr>
-          <a:xfrm>
-            <a:off x="457200" y="2478024"/>
-            <a:ext cx="11277295" cy="1051560"/>
-          </a:xfrm>
-          <a:prstGeom prst="roundRect">
-            <a:avLst>
-              <a:gd name="adj" fmla="val 12000"/>
-            </a:avLst>
-          </a:prstGeom>
-          <a:solidFill>
-            <a:srgbClr val="FFF8E1"/>
-          </a:solidFill>
-          <a:ln>
-            <a:noFill/>
-          </a:ln>
-        </p:spPr>
-        <p:style>
-          <a:lnRef idx="1">
-            <a:schemeClr val="accent1"/>
-          </a:lnRef>
-          <a:fillRef idx="3">
-            <a:schemeClr val="accent1"/>
-          </a:fillRef>
-          <a:effectRef idx="2">
-            <a:schemeClr val="accent1"/>
-          </a:effectRef>
-          <a:fontRef idx="minor">
-            <a:schemeClr val="lt1"/>
-          </a:fontRef>
-        </p:style>
-        <p:txBody>
-          <a:bodyPr rtlCol="0" anchor="ctr"/>
-          <a:lstStyle/>
-          <a:p>
-            <a:pPr algn="ctr"/>
-          </a:p>
-        </p:txBody>
-      </p:sp>
-      <p:sp>
-        <p:nvSpPr>
-          <p:cNvPr id="9" name="Rectangle 8"/>
-          <p:cNvSpPr/>
-          <p:nvPr/>
-        </p:nvSpPr>
-        <p:spPr>
-          <a:xfrm>
-            <a:off x="457200" y="2478024"/>
-            <a:ext cx="128016" cy="1051560"/>
-          </a:xfrm>
-          <a:prstGeom prst="rect">
-            <a:avLst/>
-          </a:prstGeom>
-          <a:solidFill>
-            <a:srgbClr val="FFD000"/>
-          </a:solidFill>
-          <a:ln>
-            <a:noFill/>
-          </a:ln>
-        </p:spPr>
-        <p:style>
-          <a:lnRef idx="1">
-            <a:schemeClr val="accent1"/>
-          </a:lnRef>
-          <a:fillRef idx="3">
-            <a:schemeClr val="accent1"/>
-          </a:fillRef>
-          <a:effectRef idx="2">
-            <a:schemeClr val="accent1"/>
-          </a:effectRef>
-          <a:fontRef idx="minor">
-            <a:schemeClr val="lt1"/>
-          </a:fontRef>
-        </p:style>
-        <p:txBody>
-          <a:bodyPr rtlCol="0" anchor="ctr"/>
-          <a:lstStyle/>
-          <a:p>
-            <a:pPr algn="ctr"/>
-          </a:p>
-        </p:txBody>
-      </p:sp>
-      <p:sp>
-        <p:nvSpPr>
-          <p:cNvPr id="10" name="TextBox 9"/>
-          <p:cNvSpPr txBox="1"/>
-          <p:nvPr/>
-        </p:nvSpPr>
-        <p:spPr>
-          <a:xfrm>
-            <a:off x="777240" y="2615184"/>
-            <a:ext cx="10774375" cy="822959"/>
-          </a:xfrm>
-          <a:prstGeom prst="rect">
-            <a:avLst/>
-          </a:prstGeom>
-          <a:noFill/>
-        </p:spPr>
-        <p:txBody>
-          <a:bodyPr wrap="square">
-            <a:spAutoFit/>
-          </a:bodyPr>
-          <a:lstStyle/>
-          <a:p>
-            <a:r>
-              <a:rPr sz="1200" b="1" i="0">
-                <a:solidFill>
-                  <a:srgbClr val="FFD000"/>
-                </a:solidFill>
-                <a:latin typeface="Calibri"/>
-              </a:rPr>
-              <a:t>Aclaración</a:t>
+              <a:t>–   </a:t>
+            </a:r>
+            <a:r>
+              <a:rPr sz="1600" b="1" i="0">
+                <a:solidFill>
+                  <a:srgbClr val="333333"/>
+                </a:solidFill>
+                <a:latin typeface="Calibri"/>
+              </a:rPr>
+              <a:t>Entregable:</a:t>
+            </a:r>
+            <a:r>
+              <a:rPr sz="1600" b="0" i="0">
+                <a:solidFill>
+                  <a:srgbClr val="333333"/>
+                </a:solidFill>
+                <a:latin typeface="Calibri"/>
+              </a:rPr>
+              <a:t> Checklist firmada + enlace/ZIP avance (DDL+procs+ER)</a:t>
             </a:r>
           </a:p>
           <a:p>
             <a:pPr>
-              <a:spcBef>
-                <a:spcPts val="400"/>
-              </a:spcBef>
+              <a:spcAft>
+                <a:spcPts val="800"/>
+              </a:spcAft>
             </a:pPr>
             <a:r>
-              <a:rPr sz="1400" b="0" i="0">
+              <a:rPr sz="1600" b="0" i="0">
                 <a:solidFill>
                   <a:srgbClr val="333333"/>
                 </a:solidFill>
                 <a:latin typeface="Calibri"/>
               </a:rPr>
-              <a:t>Enunciado completo: Clases/Proyecto Integrador/ (VetCare DB).</a:t>
-            </a:r>
-          </a:p>
-        </p:txBody>
-      </p:sp>
-      <p:sp>
-        <p:nvSpPr>
-          <p:cNvPr id="11" name="Rounded Rectangle 10"/>
-          <p:cNvSpPr/>
-          <p:nvPr/>
-        </p:nvSpPr>
-        <p:spPr>
-          <a:xfrm>
-            <a:off x="457200" y="3694176"/>
-            <a:ext cx="11277295" cy="1051560"/>
-          </a:xfrm>
-          <a:prstGeom prst="roundRect">
-            <a:avLst>
-              <a:gd name="adj" fmla="val 12000"/>
-            </a:avLst>
-          </a:prstGeom>
-          <a:solidFill>
-            <a:srgbClr val="FBE4E4"/>
-          </a:solidFill>
-          <a:ln>
-            <a:noFill/>
-          </a:ln>
-        </p:spPr>
-        <p:style>
-          <a:lnRef idx="1">
-            <a:schemeClr val="accent1"/>
-          </a:lnRef>
-          <a:fillRef idx="3">
-            <a:schemeClr val="accent1"/>
-          </a:fillRef>
-          <a:effectRef idx="2">
-            <a:schemeClr val="accent1"/>
-          </a:effectRef>
-          <a:fontRef idx="minor">
-            <a:schemeClr val="lt1"/>
-          </a:fontRef>
-        </p:style>
-        <p:txBody>
-          <a:bodyPr rtlCol="0" anchor="ctr"/>
-          <a:lstStyle/>
-          <a:p>
-            <a:pPr algn="ctr"/>
-          </a:p>
-        </p:txBody>
-      </p:sp>
-      <p:sp>
-        <p:nvSpPr>
-          <p:cNvPr id="12" name="Rectangle 11"/>
-          <p:cNvSpPr/>
-          <p:nvPr/>
-        </p:nvSpPr>
-        <p:spPr>
-          <a:xfrm>
-            <a:off x="457200" y="3694176"/>
-            <a:ext cx="128016" cy="1051560"/>
-          </a:xfrm>
-          <a:prstGeom prst="rect">
-            <a:avLst/>
-          </a:prstGeom>
-          <a:solidFill>
-            <a:srgbClr val="A02030"/>
-          </a:solidFill>
-          <a:ln>
-            <a:noFill/>
-          </a:ln>
-        </p:spPr>
-        <p:style>
-          <a:lnRef idx="1">
-            <a:schemeClr val="accent1"/>
-          </a:lnRef>
-          <a:fillRef idx="3">
-            <a:schemeClr val="accent1"/>
-          </a:fillRef>
-          <a:effectRef idx="2">
-            <a:schemeClr val="accent1"/>
-          </a:effectRef>
-          <a:fontRef idx="minor">
-            <a:schemeClr val="lt1"/>
-          </a:fontRef>
-        </p:style>
-        <p:txBody>
-          <a:bodyPr rtlCol="0" anchor="ctr"/>
-          <a:lstStyle/>
-          <a:p>
-            <a:pPr algn="ctr"/>
-          </a:p>
-        </p:txBody>
-      </p:sp>
-      <p:sp>
-        <p:nvSpPr>
-          <p:cNvPr id="13" name="TextBox 12"/>
-          <p:cNvSpPr txBox="1"/>
-          <p:nvPr/>
-        </p:nvSpPr>
-        <p:spPr>
-          <a:xfrm>
-            <a:off x="777240" y="3831336"/>
-            <a:ext cx="10774375" cy="822959"/>
-          </a:xfrm>
-          <a:prstGeom prst="rect">
-            <a:avLst/>
-          </a:prstGeom>
-          <a:noFill/>
-        </p:spPr>
-        <p:txBody>
-          <a:bodyPr wrap="square">
-            <a:spAutoFit/>
-          </a:bodyPr>
-          <a:lstStyle/>
-          <a:p>
-            <a:r>
-              <a:rPr sz="1200" b="1" i="0">
-                <a:solidFill>
-                  <a:srgbClr val="A02030"/>
-                </a:solidFill>
-                <a:latin typeface="Calibri"/>
-              </a:rPr>
-              <a:t>Atención</a:t>
+              <a:t>–   Evidencia en playground (enlace) o archivo SQL/PNG propio.</a:t>
             </a:r>
           </a:p>
           <a:p>
             <a:pPr>
-              <a:spcBef>
-                <a:spcPts val="400"/>
-              </a:spcBef>
+              <a:spcAft>
+                <a:spcPts val="800"/>
+              </a:spcAft>
             </a:pPr>
             <a:r>
-              <a:rPr sz="1400" b="0" i="0">
+              <a:rPr sz="1600" b="0" i="0">
                 <a:solidFill>
                   <a:srgbClr val="333333"/>
                 </a:solidFill>
                 <a:latin typeface="Calibri"/>
               </a:rPr>
-              <a:t>Taller de la semana en ExamLab (https://uniaj.examlab.workers.dev/): domingo 23:59 (regla del Acuerdo) cuando aplique.</a:t>
-            </a:r>
-          </a:p>
-        </p:txBody>
-      </p:sp>
-      <p:sp>
-        <p:nvSpPr>
-          <p:cNvPr id="14" name="TextBox 13"/>
+              <a:t>–   Actualizar checklist PI (que criterio de rubrica avanzo).</a:t>
+            </a:r>
+          </a:p>
+          <a:p>
+            <a:pPr>
+              <a:spcAft>
+                <a:spcPts val="800"/>
+              </a:spcAft>
+            </a:pPr>
+            <a:r>
+              <a:rPr sz="1600" b="0" i="0">
+                <a:solidFill>
+                  <a:srgbClr val="333333"/>
+                </a:solidFill>
+                <a:latin typeface="Calibri"/>
+              </a:rPr>
+              <a:t>–   </a:t>
+            </a:r>
+            <a:r>
+              <a:rPr sz="1600" b="1" i="0">
+                <a:solidFill>
+                  <a:srgbClr val="333333"/>
+                </a:solidFill>
+                <a:latin typeface="Calibri"/>
+              </a:rPr>
+              <a:t>Entrega en ExamLab</a:t>
+            </a:r>
+            <a:r>
+              <a:rPr sz="1600" b="0" i="0">
+                <a:solidFill>
+                  <a:srgbClr val="333333"/>
+                </a:solidFill>
+                <a:latin typeface="Calibri"/>
+              </a:rPr>
+              <a:t> (https://uniaj.examlab.workers.dev/) — domingo 23:59 cuando aplique taller.</a:t>
+            </a:r>
+          </a:p>
+        </p:txBody>
+      </p:sp>
+      <p:sp>
+        <p:nvSpPr>
+          <p:cNvPr id="6" name="TextBox 5"/>
           <p:cNvSpPr txBox="1"/>
           <p:nvPr/>
         </p:nvSpPr>
@@ -5889,6 +5515,601 @@
         <p:spPr>
           <a:xfrm>
             <a:off x="0" y="0"/>
+            <a:ext cx="12191695" cy="960120"/>
+          </a:xfrm>
+          <a:prstGeom prst="rect">
+            <a:avLst/>
+          </a:prstGeom>
+          <a:solidFill>
+            <a:srgbClr val="095292"/>
+          </a:solidFill>
+          <a:ln>
+            <a:noFill/>
+          </a:ln>
+        </p:spPr>
+        <p:style>
+          <a:lnRef idx="1">
+            <a:schemeClr val="accent1"/>
+          </a:lnRef>
+          <a:fillRef idx="3">
+            <a:schemeClr val="accent1"/>
+          </a:fillRef>
+          <a:effectRef idx="2">
+            <a:schemeClr val="accent1"/>
+          </a:effectRef>
+          <a:fontRef idx="minor">
+            <a:schemeClr val="lt1"/>
+          </a:fontRef>
+        </p:style>
+        <p:txBody>
+          <a:bodyPr rtlCol="0" anchor="ctr"/>
+          <a:lstStyle/>
+          <a:p>
+            <a:pPr algn="ctr"/>
+          </a:p>
+        </p:txBody>
+      </p:sp>
+      <p:sp>
+        <p:nvSpPr>
+          <p:cNvPr id="3" name="Rectangle 2"/>
+          <p:cNvSpPr/>
+          <p:nvPr/>
+        </p:nvSpPr>
+        <p:spPr>
+          <a:xfrm>
+            <a:off x="0" y="960120"/>
+            <a:ext cx="12191695" cy="41148"/>
+          </a:xfrm>
+          <a:prstGeom prst="rect">
+            <a:avLst/>
+          </a:prstGeom>
+          <a:solidFill>
+            <a:srgbClr val="FFD000"/>
+          </a:solidFill>
+          <a:ln>
+            <a:noFill/>
+          </a:ln>
+        </p:spPr>
+        <p:style>
+          <a:lnRef idx="1">
+            <a:schemeClr val="accent1"/>
+          </a:lnRef>
+          <a:fillRef idx="3">
+            <a:schemeClr val="accent1"/>
+          </a:fillRef>
+          <a:effectRef idx="2">
+            <a:schemeClr val="accent1"/>
+          </a:effectRef>
+          <a:fontRef idx="minor">
+            <a:schemeClr val="lt1"/>
+          </a:fontRef>
+        </p:style>
+        <p:txBody>
+          <a:bodyPr rtlCol="0" anchor="ctr"/>
+          <a:lstStyle/>
+          <a:p>
+            <a:pPr algn="ctr"/>
+          </a:p>
+        </p:txBody>
+      </p:sp>
+      <p:sp>
+        <p:nvSpPr>
+          <p:cNvPr id="4" name="TextBox 3"/>
+          <p:cNvSpPr txBox="1"/>
+          <p:nvPr/>
+        </p:nvSpPr>
+        <p:spPr>
+          <a:xfrm>
+            <a:off x="457200" y="164592"/>
+            <a:ext cx="11277295" cy="502920"/>
+          </a:xfrm>
+          <a:prstGeom prst="rect">
+            <a:avLst/>
+          </a:prstGeom>
+          <a:noFill/>
+        </p:spPr>
+        <p:txBody>
+          <a:bodyPr wrap="square">
+            <a:spAutoFit/>
+          </a:bodyPr>
+          <a:lstStyle/>
+          <a:p>
+            <a:r>
+              <a:rPr sz="2600" b="1" i="0">
+                <a:solidFill>
+                  <a:srgbClr val="FFFFFF"/>
+                </a:solidFill>
+                <a:latin typeface="Calibri"/>
+              </a:rPr>
+              <a:t>Para el PI esta semana</a:t>
+            </a:r>
+          </a:p>
+        </p:txBody>
+      </p:sp>
+      <p:sp>
+        <p:nvSpPr>
+          <p:cNvPr id="5" name="Rounded Rectangle 4"/>
+          <p:cNvSpPr/>
+          <p:nvPr/>
+        </p:nvSpPr>
+        <p:spPr>
+          <a:xfrm>
+            <a:off x="457200" y="1261872"/>
+            <a:ext cx="11277295" cy="1051560"/>
+          </a:xfrm>
+          <a:prstGeom prst="roundRect">
+            <a:avLst>
+              <a:gd name="adj" fmla="val 12000"/>
+            </a:avLst>
+          </a:prstGeom>
+          <a:solidFill>
+            <a:srgbClr val="E8F4FA"/>
+          </a:solidFill>
+          <a:ln>
+            <a:noFill/>
+          </a:ln>
+        </p:spPr>
+        <p:style>
+          <a:lnRef idx="1">
+            <a:schemeClr val="accent1"/>
+          </a:lnRef>
+          <a:fillRef idx="3">
+            <a:schemeClr val="accent1"/>
+          </a:fillRef>
+          <a:effectRef idx="2">
+            <a:schemeClr val="accent1"/>
+          </a:effectRef>
+          <a:fontRef idx="minor">
+            <a:schemeClr val="lt1"/>
+          </a:fontRef>
+        </p:style>
+        <p:txBody>
+          <a:bodyPr rtlCol="0" anchor="ctr"/>
+          <a:lstStyle/>
+          <a:p>
+            <a:pPr algn="ctr"/>
+          </a:p>
+        </p:txBody>
+      </p:sp>
+      <p:sp>
+        <p:nvSpPr>
+          <p:cNvPr id="6" name="Rectangle 5"/>
+          <p:cNvSpPr/>
+          <p:nvPr/>
+        </p:nvSpPr>
+        <p:spPr>
+          <a:xfrm>
+            <a:off x="457200" y="1261872"/>
+            <a:ext cx="128016" cy="1051560"/>
+          </a:xfrm>
+          <a:prstGeom prst="rect">
+            <a:avLst/>
+          </a:prstGeom>
+          <a:solidFill>
+            <a:srgbClr val="269CCB"/>
+          </a:solidFill>
+          <a:ln>
+            <a:noFill/>
+          </a:ln>
+        </p:spPr>
+        <p:style>
+          <a:lnRef idx="1">
+            <a:schemeClr val="accent1"/>
+          </a:lnRef>
+          <a:fillRef idx="3">
+            <a:schemeClr val="accent1"/>
+          </a:fillRef>
+          <a:effectRef idx="2">
+            <a:schemeClr val="accent1"/>
+          </a:effectRef>
+          <a:fontRef idx="minor">
+            <a:schemeClr val="lt1"/>
+          </a:fontRef>
+        </p:style>
+        <p:txBody>
+          <a:bodyPr rtlCol="0" anchor="ctr"/>
+          <a:lstStyle/>
+          <a:p>
+            <a:pPr algn="ctr"/>
+          </a:p>
+        </p:txBody>
+      </p:sp>
+      <p:sp>
+        <p:nvSpPr>
+          <p:cNvPr id="7" name="TextBox 6"/>
+          <p:cNvSpPr txBox="1"/>
+          <p:nvPr/>
+        </p:nvSpPr>
+        <p:spPr>
+          <a:xfrm>
+            <a:off x="777240" y="1399031"/>
+            <a:ext cx="10774375" cy="822959"/>
+          </a:xfrm>
+          <a:prstGeom prst="rect">
+            <a:avLst/>
+          </a:prstGeom>
+          <a:noFill/>
+        </p:spPr>
+        <p:txBody>
+          <a:bodyPr wrap="square">
+            <a:spAutoFit/>
+          </a:bodyPr>
+          <a:lstStyle/>
+          <a:p>
+            <a:r>
+              <a:rPr sz="1200" b="1" i="0">
+                <a:solidFill>
+                  <a:srgbClr val="269CCB"/>
+                </a:solidFill>
+                <a:latin typeface="Calibri"/>
+              </a:rPr>
+              <a:t>Info</a:t>
+            </a:r>
+          </a:p>
+          <a:p>
+            <a:pPr>
+              <a:spcBef>
+                <a:spcPts val="400"/>
+              </a:spcBef>
+            </a:pPr>
+            <a:r>
+              <a:rPr sz="1400" b="0" i="0">
+                <a:solidFill>
+                  <a:srgbClr val="333333"/>
+                </a:solidFill>
+                <a:latin typeface="Calibri"/>
+              </a:rPr>
+              <a:t>Hito: Demo parcial + checklist de avance (hito formal PI)</a:t>
+            </a:r>
+          </a:p>
+        </p:txBody>
+      </p:sp>
+      <p:sp>
+        <p:nvSpPr>
+          <p:cNvPr id="8" name="Rounded Rectangle 7"/>
+          <p:cNvSpPr/>
+          <p:nvPr/>
+        </p:nvSpPr>
+        <p:spPr>
+          <a:xfrm>
+            <a:off x="457200" y="2478024"/>
+            <a:ext cx="11277295" cy="1051560"/>
+          </a:xfrm>
+          <a:prstGeom prst="roundRect">
+            <a:avLst>
+              <a:gd name="adj" fmla="val 12000"/>
+            </a:avLst>
+          </a:prstGeom>
+          <a:solidFill>
+            <a:srgbClr val="FFF8E1"/>
+          </a:solidFill>
+          <a:ln>
+            <a:noFill/>
+          </a:ln>
+        </p:spPr>
+        <p:style>
+          <a:lnRef idx="1">
+            <a:schemeClr val="accent1"/>
+          </a:lnRef>
+          <a:fillRef idx="3">
+            <a:schemeClr val="accent1"/>
+          </a:fillRef>
+          <a:effectRef idx="2">
+            <a:schemeClr val="accent1"/>
+          </a:effectRef>
+          <a:fontRef idx="minor">
+            <a:schemeClr val="lt1"/>
+          </a:fontRef>
+        </p:style>
+        <p:txBody>
+          <a:bodyPr rtlCol="0" anchor="ctr"/>
+          <a:lstStyle/>
+          <a:p>
+            <a:pPr algn="ctr"/>
+          </a:p>
+        </p:txBody>
+      </p:sp>
+      <p:sp>
+        <p:nvSpPr>
+          <p:cNvPr id="9" name="Rectangle 8"/>
+          <p:cNvSpPr/>
+          <p:nvPr/>
+        </p:nvSpPr>
+        <p:spPr>
+          <a:xfrm>
+            <a:off x="457200" y="2478024"/>
+            <a:ext cx="128016" cy="1051560"/>
+          </a:xfrm>
+          <a:prstGeom prst="rect">
+            <a:avLst/>
+          </a:prstGeom>
+          <a:solidFill>
+            <a:srgbClr val="FFD000"/>
+          </a:solidFill>
+          <a:ln>
+            <a:noFill/>
+          </a:ln>
+        </p:spPr>
+        <p:style>
+          <a:lnRef idx="1">
+            <a:schemeClr val="accent1"/>
+          </a:lnRef>
+          <a:fillRef idx="3">
+            <a:schemeClr val="accent1"/>
+          </a:fillRef>
+          <a:effectRef idx="2">
+            <a:schemeClr val="accent1"/>
+          </a:effectRef>
+          <a:fontRef idx="minor">
+            <a:schemeClr val="lt1"/>
+          </a:fontRef>
+        </p:style>
+        <p:txBody>
+          <a:bodyPr rtlCol="0" anchor="ctr"/>
+          <a:lstStyle/>
+          <a:p>
+            <a:pPr algn="ctr"/>
+          </a:p>
+        </p:txBody>
+      </p:sp>
+      <p:sp>
+        <p:nvSpPr>
+          <p:cNvPr id="10" name="TextBox 9"/>
+          <p:cNvSpPr txBox="1"/>
+          <p:nvPr/>
+        </p:nvSpPr>
+        <p:spPr>
+          <a:xfrm>
+            <a:off x="777240" y="2615184"/>
+            <a:ext cx="10774375" cy="822959"/>
+          </a:xfrm>
+          <a:prstGeom prst="rect">
+            <a:avLst/>
+          </a:prstGeom>
+          <a:noFill/>
+        </p:spPr>
+        <p:txBody>
+          <a:bodyPr wrap="square">
+            <a:spAutoFit/>
+          </a:bodyPr>
+          <a:lstStyle/>
+          <a:p>
+            <a:r>
+              <a:rPr sz="1200" b="1" i="0">
+                <a:solidFill>
+                  <a:srgbClr val="FFD000"/>
+                </a:solidFill>
+                <a:latin typeface="Calibri"/>
+              </a:rPr>
+              <a:t>Aclaración</a:t>
+            </a:r>
+          </a:p>
+          <a:p>
+            <a:pPr>
+              <a:spcBef>
+                <a:spcPts val="400"/>
+              </a:spcBef>
+            </a:pPr>
+            <a:r>
+              <a:rPr sz="1400" b="0" i="0">
+                <a:solidFill>
+                  <a:srgbClr val="333333"/>
+                </a:solidFill>
+                <a:latin typeface="Calibri"/>
+              </a:rPr>
+              <a:t>Enunciado completo: Clases/Proyecto Integrador/ (VetCare DB).</a:t>
+            </a:r>
+          </a:p>
+        </p:txBody>
+      </p:sp>
+      <p:sp>
+        <p:nvSpPr>
+          <p:cNvPr id="11" name="Rounded Rectangle 10"/>
+          <p:cNvSpPr/>
+          <p:nvPr/>
+        </p:nvSpPr>
+        <p:spPr>
+          <a:xfrm>
+            <a:off x="457200" y="3694176"/>
+            <a:ext cx="11277295" cy="1051560"/>
+          </a:xfrm>
+          <a:prstGeom prst="roundRect">
+            <a:avLst>
+              <a:gd name="adj" fmla="val 12000"/>
+            </a:avLst>
+          </a:prstGeom>
+          <a:solidFill>
+            <a:srgbClr val="FBE4E4"/>
+          </a:solidFill>
+          <a:ln>
+            <a:noFill/>
+          </a:ln>
+        </p:spPr>
+        <p:style>
+          <a:lnRef idx="1">
+            <a:schemeClr val="accent1"/>
+          </a:lnRef>
+          <a:fillRef idx="3">
+            <a:schemeClr val="accent1"/>
+          </a:fillRef>
+          <a:effectRef idx="2">
+            <a:schemeClr val="accent1"/>
+          </a:effectRef>
+          <a:fontRef idx="minor">
+            <a:schemeClr val="lt1"/>
+          </a:fontRef>
+        </p:style>
+        <p:txBody>
+          <a:bodyPr rtlCol="0" anchor="ctr"/>
+          <a:lstStyle/>
+          <a:p>
+            <a:pPr algn="ctr"/>
+          </a:p>
+        </p:txBody>
+      </p:sp>
+      <p:sp>
+        <p:nvSpPr>
+          <p:cNvPr id="12" name="Rectangle 11"/>
+          <p:cNvSpPr/>
+          <p:nvPr/>
+        </p:nvSpPr>
+        <p:spPr>
+          <a:xfrm>
+            <a:off x="457200" y="3694176"/>
+            <a:ext cx="128016" cy="1051560"/>
+          </a:xfrm>
+          <a:prstGeom prst="rect">
+            <a:avLst/>
+          </a:prstGeom>
+          <a:solidFill>
+            <a:srgbClr val="A02030"/>
+          </a:solidFill>
+          <a:ln>
+            <a:noFill/>
+          </a:ln>
+        </p:spPr>
+        <p:style>
+          <a:lnRef idx="1">
+            <a:schemeClr val="accent1"/>
+          </a:lnRef>
+          <a:fillRef idx="3">
+            <a:schemeClr val="accent1"/>
+          </a:fillRef>
+          <a:effectRef idx="2">
+            <a:schemeClr val="accent1"/>
+          </a:effectRef>
+          <a:fontRef idx="minor">
+            <a:schemeClr val="lt1"/>
+          </a:fontRef>
+        </p:style>
+        <p:txBody>
+          <a:bodyPr rtlCol="0" anchor="ctr"/>
+          <a:lstStyle/>
+          <a:p>
+            <a:pPr algn="ctr"/>
+          </a:p>
+        </p:txBody>
+      </p:sp>
+      <p:sp>
+        <p:nvSpPr>
+          <p:cNvPr id="13" name="TextBox 12"/>
+          <p:cNvSpPr txBox="1"/>
+          <p:nvPr/>
+        </p:nvSpPr>
+        <p:spPr>
+          <a:xfrm>
+            <a:off x="777240" y="3831336"/>
+            <a:ext cx="10774375" cy="822959"/>
+          </a:xfrm>
+          <a:prstGeom prst="rect">
+            <a:avLst/>
+          </a:prstGeom>
+          <a:noFill/>
+        </p:spPr>
+        <p:txBody>
+          <a:bodyPr wrap="square">
+            <a:spAutoFit/>
+          </a:bodyPr>
+          <a:lstStyle/>
+          <a:p>
+            <a:r>
+              <a:rPr sz="1200" b="1" i="0">
+                <a:solidFill>
+                  <a:srgbClr val="A02030"/>
+                </a:solidFill>
+                <a:latin typeface="Calibri"/>
+              </a:rPr>
+              <a:t>Atención</a:t>
+            </a:r>
+          </a:p>
+          <a:p>
+            <a:pPr>
+              <a:spcBef>
+                <a:spcPts val="400"/>
+              </a:spcBef>
+            </a:pPr>
+            <a:r>
+              <a:rPr sz="1400" b="0" i="0">
+                <a:solidFill>
+                  <a:srgbClr val="333333"/>
+                </a:solidFill>
+                <a:latin typeface="Calibri"/>
+              </a:rPr>
+              <a:t>Taller de la semana en ExamLab (https://uniaj.examlab.workers.dev/): domingo 23:59 (regla del Acuerdo) cuando aplique.</a:t>
+            </a:r>
+          </a:p>
+        </p:txBody>
+      </p:sp>
+      <p:sp>
+        <p:nvSpPr>
+          <p:cNvPr id="14" name="TextBox 13"/>
+          <p:cNvSpPr txBox="1"/>
+          <p:nvPr/>
+        </p:nvSpPr>
+        <p:spPr>
+          <a:xfrm>
+            <a:off x="11185855" y="6473952"/>
+            <a:ext cx="640080" cy="274320"/>
+          </a:xfrm>
+          <a:prstGeom prst="rect">
+            <a:avLst/>
+          </a:prstGeom>
+          <a:noFill/>
+        </p:spPr>
+        <p:txBody>
+          <a:bodyPr wrap="square">
+            <a:spAutoFit/>
+          </a:bodyPr>
+          <a:lstStyle/>
+          <a:p>
+            <a:pPr algn="r"/>
+            <a:r>
+              <a:rPr sz="1100" b="0" i="0">
+                <a:solidFill>
+                  <a:srgbClr val="666666"/>
+                </a:solidFill>
+                <a:latin typeface="Calibri"/>
+              </a:rPr>
+              <a:t>14</a:t>
+            </a:r>
+          </a:p>
+        </p:txBody>
+      </p:sp>
+    </p:spTree>
+  </p:cSld>
+  <p:clrMapOvr>
+    <a:masterClrMapping/>
+  </p:clrMapOvr>
+</p:sld>
+</file>
+
+<file path=ppt/slides/slide15.xml><?xml version="1.0" encoding="utf-8"?>
+<p:sld xmlns:a="http://schemas.openxmlformats.org/drawingml/2006/main" xmlns:p="http://schemas.openxmlformats.org/presentationml/2006/main" xmlns:r="http://schemas.openxmlformats.org/officeDocument/2006/relationships">
+  <p:cSld>
+    <p:bg>
+      <p:bgPr>
+        <a:solidFill>
+          <a:srgbClr val="FFFFFF"/>
+        </a:solidFill>
+        <a:effectLst/>
+      </p:bgPr>
+    </p:bg>
+    <p:spTree>
+      <p:nvGrpSpPr>
+        <p:cNvPr id="1" name=""/>
+        <p:cNvGrpSpPr/>
+        <p:nvPr/>
+      </p:nvGrpSpPr>
+      <p:grpSpPr/>
+      <p:sp>
+        <p:nvSpPr>
+          <p:cNvPr id="2" name="Rectangle 1"/>
+          <p:cNvSpPr/>
+          <p:nvPr/>
+        </p:nvSpPr>
+        <p:spPr>
+          <a:xfrm>
+            <a:off x="0" y="0"/>
             <a:ext cx="12191695" cy="164592"/>
           </a:xfrm>
           <a:prstGeom prst="rect">
@@ -8193,8 +8414,8 @@
         </p:blipFill>
         <p:spPr>
           <a:xfrm>
-            <a:off x="1743913" y="1792224"/>
-            <a:ext cx="1051560" cy="1051560"/>
+            <a:off x="1659331" y="1847087"/>
+            <a:ext cx="1220724" cy="1220724"/>
           </a:xfrm>
           <a:prstGeom prst="rect">
             <a:avLst/>
@@ -8209,8 +8430,8 @@
         </p:nvSpPr>
         <p:spPr>
           <a:xfrm>
-            <a:off x="530352" y="2916936"/>
-            <a:ext cx="3478682" cy="502920"/>
+            <a:off x="530352" y="3159251"/>
+            <a:ext cx="3478682" cy="621792"/>
           </a:xfrm>
           <a:prstGeom prst="rect">
             <a:avLst/>
@@ -8397,8 +8618,8 @@
         </p:blipFill>
         <p:spPr>
           <a:xfrm>
-            <a:off x="5570067" y="1792224"/>
-            <a:ext cx="1051560" cy="1051560"/>
+            <a:off x="5485485" y="1847087"/>
+            <a:ext cx="1220724" cy="1220724"/>
           </a:xfrm>
           <a:prstGeom prst="rect">
             <a:avLst/>
@@ -8413,8 +8634,8 @@
         </p:nvSpPr>
         <p:spPr>
           <a:xfrm>
-            <a:off x="4356506" y="2916936"/>
-            <a:ext cx="3478682" cy="502920"/>
+            <a:off x="4356506" y="3159251"/>
+            <a:ext cx="3478682" cy="621792"/>
           </a:xfrm>
           <a:prstGeom prst="rect">
             <a:avLst/>
@@ -8601,8 +8822,8 @@
         </p:blipFill>
         <p:spPr>
           <a:xfrm>
-            <a:off x="9396222" y="1792224"/>
-            <a:ext cx="1051560" cy="1051560"/>
+            <a:off x="9311640" y="1847087"/>
+            <a:ext cx="1220724" cy="1220724"/>
           </a:xfrm>
           <a:prstGeom prst="rect">
             <a:avLst/>
@@ -8617,8 +8838,8 @@
         </p:nvSpPr>
         <p:spPr>
           <a:xfrm>
-            <a:off x="8182660" y="2916936"/>
-            <a:ext cx="3478682" cy="502920"/>
+            <a:off x="8182660" y="3159251"/>
+            <a:ext cx="3478682" cy="621792"/>
           </a:xfrm>
           <a:prstGeom prst="rect">
             <a:avLst/>
@@ -8666,7 +8887,7 @@
         </p:nvSpPr>
         <p:spPr>
           <a:xfrm>
-            <a:off x="457200" y="4055364"/>
+            <a:off x="4283354" y="4055364"/>
             <a:ext cx="3624986" cy="2299716"/>
           </a:xfrm>
           <a:prstGeom prst="roundRect">
@@ -8711,7 +8932,7 @@
         </p:nvSpPr>
         <p:spPr>
           <a:xfrm>
-            <a:off x="457200" y="4055364"/>
+            <a:off x="4283354" y="4055364"/>
             <a:ext cx="3624986" cy="64008"/>
           </a:xfrm>
           <a:prstGeom prst="rect">
@@ -8754,7 +8975,7 @@
         </p:nvSpPr>
         <p:spPr>
           <a:xfrm>
-            <a:off x="457200" y="4119372"/>
+            <a:off x="4283354" y="4119372"/>
             <a:ext cx="3624986" cy="27432"/>
           </a:xfrm>
           <a:prstGeom prst="rect">
@@ -8805,8 +9026,8 @@
         </p:blipFill>
         <p:spPr>
           <a:xfrm>
-            <a:off x="1743913" y="4256532"/>
-            <a:ext cx="1051560" cy="1051560"/>
+            <a:off x="5485485" y="4311396"/>
+            <a:ext cx="1220724" cy="1220724"/>
           </a:xfrm>
           <a:prstGeom prst="rect">
             <a:avLst/>
@@ -8821,8 +9042,8 @@
         </p:nvSpPr>
         <p:spPr>
           <a:xfrm>
-            <a:off x="530352" y="5381244"/>
-            <a:ext cx="3478682" cy="502920"/>
+            <a:off x="4356506" y="5623560"/>
+            <a:ext cx="3478682" cy="621792"/>
           </a:xfrm>
           <a:prstGeom prst="rect">
             <a:avLst/>
@@ -8932,7 +9153,7 @@
         <p:spPr>
           <a:xfrm>
             <a:off x="0" y="0"/>
-            <a:ext cx="12191695" cy="960120"/>
+            <a:ext cx="12191695" cy="1170432"/>
           </a:xfrm>
           <a:prstGeom prst="rect">
             <a:avLst/>
@@ -8974,7 +9195,7 @@
         </p:nvSpPr>
         <p:spPr>
           <a:xfrm>
-            <a:off x="0" y="960120"/>
+            <a:off x="0" y="1170432"/>
             <a:ext cx="12191695" cy="41148"/>
           </a:xfrm>
           <a:prstGeom prst="rect">
@@ -9018,7 +9239,7 @@
         <p:spPr>
           <a:xfrm>
             <a:off x="457200" y="164592"/>
-            <a:ext cx="11277295" cy="502920"/>
+            <a:ext cx="11277295" cy="384048"/>
           </a:xfrm>
           <a:prstGeom prst="rect">
             <a:avLst/>
@@ -9038,7 +9259,7 @@
                 </a:solidFill>
                 <a:latin typeface="Calibri"/>
               </a:rPr>
-              <a:t>Taller PI VetCare — contexto / por que importa</a:t>
+              <a:t>Del boceto a ExamLab (diagrama)</a:t>
             </a:r>
           </a:p>
         </p:txBody>
@@ -9051,8 +9272,8 @@
         </p:nvSpPr>
         <p:spPr>
           <a:xfrm>
-            <a:off x="457200" y="1170432"/>
-            <a:ext cx="11277295" cy="5230368"/>
+            <a:off x="457200" y="566928"/>
+            <a:ext cx="11277295" cy="411480"/>
           </a:xfrm>
           <a:prstGeom prst="rect">
             <a:avLst/>
@@ -9065,60 +9286,705 @@
           </a:bodyPr>
           <a:lstStyle/>
           <a:p>
+            <a:r>
+              <a:rPr sz="1400" b="0" i="0">
+                <a:solidFill>
+                  <a:srgbClr val="B8D8EE"/>
+                </a:solidFill>
+                <a:latin typeface="Calibri"/>
+              </a:rPr>
+              <a:t>El diagrama se entrega como codigo Mermaid dentro de ExamLab, no como imagen</a:t>
+            </a:r>
+          </a:p>
+        </p:txBody>
+      </p:sp>
+      <p:sp>
+        <p:nvSpPr>
+          <p:cNvPr id="6" name="Rounded Rectangle 5"/>
+          <p:cNvSpPr/>
+          <p:nvPr/>
+        </p:nvSpPr>
+        <p:spPr>
+          <a:xfrm>
+            <a:off x="457200" y="1659636"/>
+            <a:ext cx="11277295" cy="1051560"/>
+          </a:xfrm>
+          <a:prstGeom prst="roundRect">
+            <a:avLst>
+              <a:gd name="adj" fmla="val 12000"/>
+            </a:avLst>
+          </a:prstGeom>
+          <a:solidFill>
+            <a:srgbClr val="F2F2F2"/>
+          </a:solidFill>
+          <a:ln>
+            <a:noFill/>
+          </a:ln>
+        </p:spPr>
+        <p:style>
+          <a:lnRef idx="1">
+            <a:schemeClr val="accent1"/>
+          </a:lnRef>
+          <a:fillRef idx="3">
+            <a:schemeClr val="accent1"/>
+          </a:fillRef>
+          <a:effectRef idx="2">
+            <a:schemeClr val="accent1"/>
+          </a:effectRef>
+          <a:fontRef idx="minor">
+            <a:schemeClr val="lt1"/>
+          </a:fontRef>
+        </p:style>
+        <p:txBody>
+          <a:bodyPr rtlCol="0" anchor="ctr"/>
+          <a:lstStyle/>
+          <a:p>
+            <a:pPr algn="ctr"/>
+          </a:p>
+        </p:txBody>
+      </p:sp>
+      <p:sp>
+        <p:nvSpPr>
+          <p:cNvPr id="7" name="Rounded Rectangle 6"/>
+          <p:cNvSpPr/>
+          <p:nvPr/>
+        </p:nvSpPr>
+        <p:spPr>
+          <a:xfrm>
+            <a:off x="594360" y="1965960"/>
+            <a:ext cx="438912" cy="438912"/>
+          </a:xfrm>
+          <a:prstGeom prst="roundRect">
+            <a:avLst>
+              <a:gd name="adj" fmla="val 12000"/>
+            </a:avLst>
+          </a:prstGeom>
+          <a:solidFill>
+            <a:srgbClr val="095292"/>
+          </a:solidFill>
+          <a:ln>
+            <a:noFill/>
+          </a:ln>
+        </p:spPr>
+        <p:style>
+          <a:lnRef idx="1">
+            <a:schemeClr val="accent1"/>
+          </a:lnRef>
+          <a:fillRef idx="3">
+            <a:schemeClr val="accent1"/>
+          </a:fillRef>
+          <a:effectRef idx="2">
+            <a:schemeClr val="accent1"/>
+          </a:effectRef>
+          <a:fontRef idx="minor">
+            <a:schemeClr val="lt1"/>
+          </a:fontRef>
+        </p:style>
+        <p:txBody>
+          <a:bodyPr rtlCol="0" anchor="ctr"/>
+          <a:lstStyle/>
+          <a:p>
+            <a:pPr algn="ctr"/>
+          </a:p>
+        </p:txBody>
+      </p:sp>
+      <p:sp>
+        <p:nvSpPr>
+          <p:cNvPr id="8" name="TextBox 7"/>
+          <p:cNvSpPr txBox="1"/>
+          <p:nvPr/>
+        </p:nvSpPr>
+        <p:spPr>
+          <a:xfrm>
+            <a:off x="594360" y="1965960"/>
+            <a:ext cx="438912" cy="438912"/>
+          </a:xfrm>
+          <a:prstGeom prst="rect">
+            <a:avLst/>
+          </a:prstGeom>
+          <a:noFill/>
+        </p:spPr>
+        <p:txBody>
+          <a:bodyPr wrap="square" anchor="ctr"/>
+          <a:lstStyle/>
+          <a:p>
+            <a:pPr algn="ctr"/>
+            <a:r>
+              <a:rPr sz="1600" b="1" i="0">
+                <a:solidFill>
+                  <a:srgbClr val="FFFFFF"/>
+                </a:solidFill>
+                <a:latin typeface="Calibri"/>
+              </a:rPr>
+              <a:t>1</a:t>
+            </a:r>
+          </a:p>
+        </p:txBody>
+      </p:sp>
+      <p:sp>
+        <p:nvSpPr>
+          <p:cNvPr id="9" name="TextBox 8"/>
+          <p:cNvSpPr txBox="1"/>
+          <p:nvPr/>
+        </p:nvSpPr>
+        <p:spPr>
+          <a:xfrm>
+            <a:off x="1188720" y="1751076"/>
+            <a:ext cx="10271455" cy="886968"/>
+          </a:xfrm>
+          <a:prstGeom prst="rect">
+            <a:avLst/>
+          </a:prstGeom>
+          <a:noFill/>
+        </p:spPr>
+        <p:txBody>
+          <a:bodyPr wrap="square" anchor="ctr"/>
+          <a:lstStyle/>
+          <a:p>
+            <a:r>
+              <a:rPr sz="1500" b="1" i="0">
+                <a:solidFill>
+                  <a:srgbClr val="095292"/>
+                </a:solidFill>
+                <a:latin typeface="Calibri"/>
+              </a:rPr>
+              <a:t>Disena visual</a:t>
+            </a:r>
+          </a:p>
+          <a:p>
             <a:pPr>
-              <a:spcAft>
-                <a:spcPts val="800"/>
-              </a:spcAft>
+              <a:spcBef>
+                <a:spcPts val="200"/>
+              </a:spcBef>
             </a:pPr>
             <a:r>
-              <a:rPr sz="1600" b="0" i="0">
+              <a:rPr sz="1300" b="0" i="0">
                 <a:solidFill>
                   <a:srgbClr val="333333"/>
                 </a:solidFill>
                 <a:latin typeface="Calibri"/>
               </a:rPr>
-              <a:t>–   </a:t>
-            </a:r>
+              <a:t>Dibuja el diagrama como quieras en Excalidraw o draw.io: es mas rapido arrastrar cajas que escribir codigo, y ahi es donde piensas el modelo.</a:t>
+            </a:r>
+          </a:p>
+        </p:txBody>
+      </p:sp>
+      <p:sp>
+        <p:nvSpPr>
+          <p:cNvPr id="10" name="Rounded Rectangle 9"/>
+          <p:cNvSpPr/>
+          <p:nvPr/>
+        </p:nvSpPr>
+        <p:spPr>
+          <a:xfrm>
+            <a:off x="457200" y="2802636"/>
+            <a:ext cx="11277295" cy="1051560"/>
+          </a:xfrm>
+          <a:prstGeom prst="roundRect">
+            <a:avLst>
+              <a:gd name="adj" fmla="val 12000"/>
+            </a:avLst>
+          </a:prstGeom>
+          <a:solidFill>
+            <a:srgbClr val="E8F4FA"/>
+          </a:solidFill>
+          <a:ln>
+            <a:noFill/>
+          </a:ln>
+        </p:spPr>
+        <p:style>
+          <a:lnRef idx="1">
+            <a:schemeClr val="accent1"/>
+          </a:lnRef>
+          <a:fillRef idx="3">
+            <a:schemeClr val="accent1"/>
+          </a:fillRef>
+          <a:effectRef idx="2">
+            <a:schemeClr val="accent1"/>
+          </a:effectRef>
+          <a:fontRef idx="minor">
+            <a:schemeClr val="lt1"/>
+          </a:fontRef>
+        </p:style>
+        <p:txBody>
+          <a:bodyPr rtlCol="0" anchor="ctr"/>
+          <a:lstStyle/>
+          <a:p>
+            <a:pPr algn="ctr"/>
+          </a:p>
+        </p:txBody>
+      </p:sp>
+      <p:sp>
+        <p:nvSpPr>
+          <p:cNvPr id="11" name="Rounded Rectangle 10"/>
+          <p:cNvSpPr/>
+          <p:nvPr/>
+        </p:nvSpPr>
+        <p:spPr>
+          <a:xfrm>
+            <a:off x="594360" y="3108960"/>
+            <a:ext cx="438912" cy="438912"/>
+          </a:xfrm>
+          <a:prstGeom prst="roundRect">
+            <a:avLst>
+              <a:gd name="adj" fmla="val 12000"/>
+            </a:avLst>
+          </a:prstGeom>
+          <a:solidFill>
+            <a:srgbClr val="095292"/>
+          </a:solidFill>
+          <a:ln>
+            <a:noFill/>
+          </a:ln>
+        </p:spPr>
+        <p:style>
+          <a:lnRef idx="1">
+            <a:schemeClr val="accent1"/>
+          </a:lnRef>
+          <a:fillRef idx="3">
+            <a:schemeClr val="accent1"/>
+          </a:fillRef>
+          <a:effectRef idx="2">
+            <a:schemeClr val="accent1"/>
+          </a:effectRef>
+          <a:fontRef idx="minor">
+            <a:schemeClr val="lt1"/>
+          </a:fontRef>
+        </p:style>
+        <p:txBody>
+          <a:bodyPr rtlCol="0" anchor="ctr"/>
+          <a:lstStyle/>
+          <a:p>
+            <a:pPr algn="ctr"/>
+          </a:p>
+        </p:txBody>
+      </p:sp>
+      <p:sp>
+        <p:nvSpPr>
+          <p:cNvPr id="12" name="TextBox 11"/>
+          <p:cNvSpPr txBox="1"/>
+          <p:nvPr/>
+        </p:nvSpPr>
+        <p:spPr>
+          <a:xfrm>
+            <a:off x="594360" y="3108960"/>
+            <a:ext cx="438912" cy="438912"/>
+          </a:xfrm>
+          <a:prstGeom prst="rect">
+            <a:avLst/>
+          </a:prstGeom>
+          <a:noFill/>
+        </p:spPr>
+        <p:txBody>
+          <a:bodyPr wrap="square" anchor="ctr"/>
+          <a:lstStyle/>
+          <a:p>
+            <a:pPr algn="ctr"/>
             <a:r>
               <a:rPr sz="1600" b="1" i="0">
                 <a:solidFill>
+                  <a:srgbClr val="FFFFFF"/>
+                </a:solidFill>
+                <a:latin typeface="Calibri"/>
+              </a:rPr>
+              <a:t>2</a:t>
+            </a:r>
+          </a:p>
+        </p:txBody>
+      </p:sp>
+      <p:sp>
+        <p:nvSpPr>
+          <p:cNvPr id="13" name="TextBox 12"/>
+          <p:cNvSpPr txBox="1"/>
+          <p:nvPr/>
+        </p:nvSpPr>
+        <p:spPr>
+          <a:xfrm>
+            <a:off x="1188720" y="2894076"/>
+            <a:ext cx="10271455" cy="886968"/>
+          </a:xfrm>
+          <a:prstGeom prst="rect">
+            <a:avLst/>
+          </a:prstGeom>
+          <a:noFill/>
+        </p:spPr>
+        <p:txBody>
+          <a:bodyPr wrap="square" anchor="ctr"/>
+          <a:lstStyle/>
+          <a:p>
+            <a:r>
+              <a:rPr sz="1500" b="1" i="0">
+                <a:solidFill>
+                  <a:srgbClr val="095292"/>
+                </a:solidFill>
+                <a:latin typeface="Calibri"/>
+              </a:rPr>
+              <a:t>Traduce con IA</a:t>
+            </a:r>
+          </a:p>
+          <a:p>
+            <a:pPr>
+              <a:spcBef>
+                <a:spcPts val="200"/>
+              </a:spcBef>
+            </a:pPr>
+            <a:r>
+              <a:rPr sz="1300" b="0" i="0">
+                <a:solidFill>
                   <a:srgbClr val="333333"/>
                 </a:solidFill>
                 <a:latin typeface="Calibri"/>
               </a:rPr>
-              <a:t>Por qué importa al PI:</a:t>
-            </a:r>
-            <a:r>
-              <a:rPr sz="1600" b="0" i="0">
+              <a:t>Copia o describe tu boceto a una IA y pidele el codigo Mermaid: «convierte este diagrama a Mermaid usando erDiagram». Revisa el resultado: la IA acierta la sintaxis, no tu modelo.</a:t>
+            </a:r>
+          </a:p>
+        </p:txBody>
+      </p:sp>
+      <p:sp>
+        <p:nvSpPr>
+          <p:cNvPr id="14" name="Rounded Rectangle 13"/>
+          <p:cNvSpPr/>
+          <p:nvPr/>
+        </p:nvSpPr>
+        <p:spPr>
+          <a:xfrm>
+            <a:off x="457200" y="3945636"/>
+            <a:ext cx="11277295" cy="1051560"/>
+          </a:xfrm>
+          <a:prstGeom prst="roundRect">
+            <a:avLst>
+              <a:gd name="adj" fmla="val 12000"/>
+            </a:avLst>
+          </a:prstGeom>
+          <a:solidFill>
+            <a:srgbClr val="F2F2F2"/>
+          </a:solidFill>
+          <a:ln>
+            <a:noFill/>
+          </a:ln>
+        </p:spPr>
+        <p:style>
+          <a:lnRef idx="1">
+            <a:schemeClr val="accent1"/>
+          </a:lnRef>
+          <a:fillRef idx="3">
+            <a:schemeClr val="accent1"/>
+          </a:fillRef>
+          <a:effectRef idx="2">
+            <a:schemeClr val="accent1"/>
+          </a:effectRef>
+          <a:fontRef idx="minor">
+            <a:schemeClr val="lt1"/>
+          </a:fontRef>
+        </p:style>
+        <p:txBody>
+          <a:bodyPr rtlCol="0" anchor="ctr"/>
+          <a:lstStyle/>
+          <a:p>
+            <a:pPr algn="ctr"/>
+          </a:p>
+        </p:txBody>
+      </p:sp>
+      <p:sp>
+        <p:nvSpPr>
+          <p:cNvPr id="15" name="Rounded Rectangle 14"/>
+          <p:cNvSpPr/>
+          <p:nvPr/>
+        </p:nvSpPr>
+        <p:spPr>
+          <a:xfrm>
+            <a:off x="594360" y="4251960"/>
+            <a:ext cx="438912" cy="438912"/>
+          </a:xfrm>
+          <a:prstGeom prst="roundRect">
+            <a:avLst>
+              <a:gd name="adj" fmla="val 12000"/>
+            </a:avLst>
+          </a:prstGeom>
+          <a:solidFill>
+            <a:srgbClr val="095292"/>
+          </a:solidFill>
+          <a:ln>
+            <a:noFill/>
+          </a:ln>
+        </p:spPr>
+        <p:style>
+          <a:lnRef idx="1">
+            <a:schemeClr val="accent1"/>
+          </a:lnRef>
+          <a:fillRef idx="3">
+            <a:schemeClr val="accent1"/>
+          </a:fillRef>
+          <a:effectRef idx="2">
+            <a:schemeClr val="accent1"/>
+          </a:effectRef>
+          <a:fontRef idx="minor">
+            <a:schemeClr val="lt1"/>
+          </a:fontRef>
+        </p:style>
+        <p:txBody>
+          <a:bodyPr rtlCol="0" anchor="ctr"/>
+          <a:lstStyle/>
+          <a:p>
+            <a:pPr algn="ctr"/>
+          </a:p>
+        </p:txBody>
+      </p:sp>
+      <p:sp>
+        <p:nvSpPr>
+          <p:cNvPr id="16" name="TextBox 15"/>
+          <p:cNvSpPr txBox="1"/>
+          <p:nvPr/>
+        </p:nvSpPr>
+        <p:spPr>
+          <a:xfrm>
+            <a:off x="594360" y="4251960"/>
+            <a:ext cx="438912" cy="438912"/>
+          </a:xfrm>
+          <a:prstGeom prst="rect">
+            <a:avLst/>
+          </a:prstGeom>
+          <a:noFill/>
+        </p:spPr>
+        <p:txBody>
+          <a:bodyPr wrap="square" anchor="ctr"/>
+          <a:lstStyle/>
+          <a:p>
+            <a:pPr algn="ctr"/>
+            <a:r>
+              <a:rPr sz="1600" b="1" i="0">
+                <a:solidFill>
+                  <a:srgbClr val="FFFFFF"/>
+                </a:solidFill>
+                <a:latin typeface="Calibri"/>
+              </a:rPr>
+              <a:t>3</a:t>
+            </a:r>
+          </a:p>
+        </p:txBody>
+      </p:sp>
+      <p:sp>
+        <p:nvSpPr>
+          <p:cNvPr id="17" name="TextBox 16"/>
+          <p:cNvSpPr txBox="1"/>
+          <p:nvPr/>
+        </p:nvSpPr>
+        <p:spPr>
+          <a:xfrm>
+            <a:off x="1188720" y="4037076"/>
+            <a:ext cx="10271455" cy="886968"/>
+          </a:xfrm>
+          <a:prstGeom prst="rect">
+            <a:avLst/>
+          </a:prstGeom>
+          <a:noFill/>
+        </p:spPr>
+        <p:txBody>
+          <a:bodyPr wrap="square" anchor="ctr"/>
+          <a:lstStyle/>
+          <a:p>
+            <a:r>
+              <a:rPr sz="1500" b="1" i="0">
+                <a:solidFill>
+                  <a:srgbClr val="095292"/>
+                </a:solidFill>
+                <a:latin typeface="Calibri"/>
+              </a:rPr>
+              <a:t>Pega y renderiza en ExamLab</a:t>
+            </a:r>
+          </a:p>
+          <a:p>
+            <a:pPr>
+              <a:spcBef>
+                <a:spcPts val="200"/>
+              </a:spcBef>
+            </a:pPr>
+            <a:r>
+              <a:rPr sz="1300" b="0" i="0">
                 <a:solidFill>
                   <a:srgbClr val="333333"/>
                 </a:solidFill>
                 <a:latin typeface="Calibri"/>
               </a:rPr>
-              <a:t> checkpoint vs rúbrica.</a:t>
+              <a:t>Pega ese codigo en la caja de texto de la pregunta y mira como lo dibuja la plataforma. Si no renderiza, corrige ahi mismo: lo que se califica es el diagrama renderizado dentro de ExamLab.</a:t>
+            </a:r>
+          </a:p>
+        </p:txBody>
+      </p:sp>
+      <p:sp>
+        <p:nvSpPr>
+          <p:cNvPr id="18" name="Rounded Rectangle 17"/>
+          <p:cNvSpPr/>
+          <p:nvPr/>
+        </p:nvSpPr>
+        <p:spPr>
+          <a:xfrm>
+            <a:off x="457200" y="5088636"/>
+            <a:ext cx="11277295" cy="1051560"/>
+          </a:xfrm>
+          <a:prstGeom prst="roundRect">
+            <a:avLst>
+              <a:gd name="adj" fmla="val 12000"/>
+            </a:avLst>
+          </a:prstGeom>
+          <a:solidFill>
+            <a:srgbClr val="E8F4FA"/>
+          </a:solidFill>
+          <a:ln>
+            <a:noFill/>
+          </a:ln>
+        </p:spPr>
+        <p:style>
+          <a:lnRef idx="1">
+            <a:schemeClr val="accent1"/>
+          </a:lnRef>
+          <a:fillRef idx="3">
+            <a:schemeClr val="accent1"/>
+          </a:fillRef>
+          <a:effectRef idx="2">
+            <a:schemeClr val="accent1"/>
+          </a:effectRef>
+          <a:fontRef idx="minor">
+            <a:schemeClr val="lt1"/>
+          </a:fontRef>
+        </p:style>
+        <p:txBody>
+          <a:bodyPr rtlCol="0" anchor="ctr"/>
+          <a:lstStyle/>
+          <a:p>
+            <a:pPr algn="ctr"/>
+          </a:p>
+        </p:txBody>
+      </p:sp>
+      <p:sp>
+        <p:nvSpPr>
+          <p:cNvPr id="19" name="Rounded Rectangle 18"/>
+          <p:cNvSpPr/>
+          <p:nvPr/>
+        </p:nvSpPr>
+        <p:spPr>
+          <a:xfrm>
+            <a:off x="594360" y="5394960"/>
+            <a:ext cx="438912" cy="438912"/>
+          </a:xfrm>
+          <a:prstGeom prst="roundRect">
+            <a:avLst>
+              <a:gd name="adj" fmla="val 12000"/>
+            </a:avLst>
+          </a:prstGeom>
+          <a:solidFill>
+            <a:srgbClr val="095292"/>
+          </a:solidFill>
+          <a:ln>
+            <a:noFill/>
+          </a:ln>
+        </p:spPr>
+        <p:style>
+          <a:lnRef idx="1">
+            <a:schemeClr val="accent1"/>
+          </a:lnRef>
+          <a:fillRef idx="3">
+            <a:schemeClr val="accent1"/>
+          </a:fillRef>
+          <a:effectRef idx="2">
+            <a:schemeClr val="accent1"/>
+          </a:effectRef>
+          <a:fontRef idx="minor">
+            <a:schemeClr val="lt1"/>
+          </a:fontRef>
+        </p:style>
+        <p:txBody>
+          <a:bodyPr rtlCol="0" anchor="ctr"/>
+          <a:lstStyle/>
+          <a:p>
+            <a:pPr algn="ctr"/>
+          </a:p>
+        </p:txBody>
+      </p:sp>
+      <p:sp>
+        <p:nvSpPr>
+          <p:cNvPr id="20" name="TextBox 19"/>
+          <p:cNvSpPr txBox="1"/>
+          <p:nvPr/>
+        </p:nvSpPr>
+        <p:spPr>
+          <a:xfrm>
+            <a:off x="594360" y="5394960"/>
+            <a:ext cx="438912" cy="438912"/>
+          </a:xfrm>
+          <a:prstGeom prst="rect">
+            <a:avLst/>
+          </a:prstGeom>
+          <a:noFill/>
+        </p:spPr>
+        <p:txBody>
+          <a:bodyPr wrap="square" anchor="ctr"/>
+          <a:lstStyle/>
+          <a:p>
+            <a:pPr algn="ctr"/>
+            <a:r>
+              <a:rPr sz="1600" b="1" i="0">
+                <a:solidFill>
+                  <a:srgbClr val="FFFFFF"/>
+                </a:solidFill>
+                <a:latin typeface="Calibri"/>
+              </a:rPr>
+              <a:t>4</a:t>
+            </a:r>
+          </a:p>
+        </p:txBody>
+      </p:sp>
+      <p:sp>
+        <p:nvSpPr>
+          <p:cNvPr id="21" name="TextBox 20"/>
+          <p:cNvSpPr txBox="1"/>
+          <p:nvPr/>
+        </p:nvSpPr>
+        <p:spPr>
+          <a:xfrm>
+            <a:off x="1188720" y="5180076"/>
+            <a:ext cx="10271455" cy="886968"/>
+          </a:xfrm>
+          <a:prstGeom prst="rect">
+            <a:avLst/>
+          </a:prstGeom>
+          <a:noFill/>
+        </p:spPr>
+        <p:txBody>
+          <a:bodyPr wrap="square" anchor="ctr"/>
+          <a:lstStyle/>
+          <a:p>
+            <a:r>
+              <a:rPr sz="1500" b="1" i="0">
+                <a:solidFill>
+                  <a:srgbClr val="095292"/>
+                </a:solidFill>
+                <a:latin typeface="Calibri"/>
+              </a:rPr>
+              <a:t>Guarda el PNG para tu PI</a:t>
             </a:r>
           </a:p>
           <a:p>
             <a:pPr>
-              <a:spcAft>
-                <a:spcPts val="800"/>
-              </a:spcAft>
+              <a:spcBef>
+                <a:spcPts val="200"/>
+              </a:spcBef>
             </a:pPr>
             <a:r>
-              <a:rPr sz="1600" b="0" i="0">
+              <a:rPr sz="1300" b="0" i="0">
                 <a:solidFill>
                   <a:srgbClr val="333333"/>
                 </a:solidFill>
                 <a:latin typeface="Calibri"/>
               </a:rPr>
-              <a:t>–   Demo + gaps con responsable.</a:t>
-            </a:r>
-          </a:p>
-        </p:txBody>
-      </p:sp>
-      <p:sp>
-        <p:nvSpPr>
-          <p:cNvPr id="6" name="TextBox 5"/>
+              <a:t>Exporta tambien la imagen a la carpeta de tu Proyecto Integrador. Esa copia es para tu informe; no reemplaza la respuesta en la plataforma.</a:t>
+            </a:r>
+          </a:p>
+        </p:txBody>
+      </p:sp>
+      <p:sp>
+        <p:nvSpPr>
+          <p:cNvPr id="22" name="TextBox 21"/>
           <p:cNvSpPr txBox="1"/>
           <p:nvPr/>
         </p:nvSpPr>
@@ -9292,7 +10158,7 @@
                 </a:solidFill>
                 <a:latin typeface="Calibri"/>
               </a:rPr>
-              <a:t>Taller PI VetCare — objetivo y criterios</a:t>
+              <a:t>Taller PI VetCare — contexto / por que importa</a:t>
             </a:r>
           </a:p>
         </p:txBody>
@@ -9325,7 +10191,7 @@
               </a:spcAft>
             </a:pPr>
             <a:r>
-              <a:rPr sz="1500" b="0" i="0">
+              <a:rPr sz="1600" b="0" i="0">
                 <a:solidFill>
                   <a:srgbClr val="333333"/>
                 </a:solidFill>
@@ -9334,22 +10200,22 @@
               <a:t>–   </a:t>
             </a:r>
             <a:r>
-              <a:rPr sz="1500" b="1" i="0">
+              <a:rPr sz="1600" b="1" i="0">
                 <a:solidFill>
                   <a:srgbClr val="333333"/>
                 </a:solidFill>
                 <a:latin typeface="Calibri"/>
               </a:rPr>
-              <a:t>Objetivo:</a:t>
-            </a:r>
-            <a:r>
-              <a:rPr sz="1500" b="0" i="0">
+              <a:t>Por qué importa al PI:</a:t>
+            </a:r>
+            <a:r>
+              <a:rPr sz="1600" b="0" i="0">
                 <a:solidFill>
                   <a:srgbClr val="333333"/>
                 </a:solidFill>
                 <a:latin typeface="Calibri"/>
               </a:rPr>
-              <a:t> Checklist avance + demo 3-5 min.</a:t>
+              <a:t> checkpoint vs rúbrica.</a:t>
             </a:r>
           </a:p>
           <a:p>
@@ -9359,133 +10225,13 @@
               </a:spcAft>
             </a:pPr>
             <a:r>
-              <a:rPr sz="1500" b="0" i="0">
+              <a:rPr sz="1600" b="0" i="0">
                 <a:solidFill>
                   <a:srgbClr val="333333"/>
                 </a:solidFill>
                 <a:latin typeface="Calibri"/>
               </a:rPr>
-              <a:t>–   </a:t>
-            </a:r>
-            <a:r>
-              <a:rPr sz="1500" b="1" i="0">
-                <a:solidFill>
-                  <a:srgbClr val="333333"/>
-                </a:solidFill>
-                <a:latin typeface="Calibri"/>
-              </a:rPr>
-              <a:t>Exito:</a:t>
-            </a:r>
-            <a:r>
-              <a:rPr sz="1500" b="0" i="0">
-                <a:solidFill>
-                  <a:srgbClr val="333333"/>
-                </a:solidFill>
-                <a:latin typeface="Calibri"/>
-              </a:rPr>
-              <a:t> Checklist evidenciada.</a:t>
-            </a:r>
-          </a:p>
-          <a:p>
-            <a:pPr>
-              <a:spcAft>
-                <a:spcPts val="800"/>
-              </a:spcAft>
-            </a:pPr>
-            <a:r>
-              <a:rPr sz="1500" b="0" i="0">
-                <a:solidFill>
-                  <a:srgbClr val="333333"/>
-                </a:solidFill>
-                <a:latin typeface="Calibri"/>
-              </a:rPr>
-              <a:t>–   </a:t>
-            </a:r>
-            <a:r>
-              <a:rPr sz="1500" b="1" i="0">
-                <a:solidFill>
-                  <a:srgbClr val="333333"/>
-                </a:solidFill>
-                <a:latin typeface="Calibri"/>
-              </a:rPr>
-              <a:t>Exito:</a:t>
-            </a:r>
-            <a:r>
-              <a:rPr sz="1500" b="0" i="0">
-                <a:solidFill>
-                  <a:srgbClr val="333333"/>
-                </a:solidFill>
-                <a:latin typeface="Calibri"/>
-              </a:rPr>
-              <a:t> Demo ER+proc+trigger.</a:t>
-            </a:r>
-          </a:p>
-          <a:p>
-            <a:pPr>
-              <a:spcAft>
-                <a:spcPts val="800"/>
-              </a:spcAft>
-            </a:pPr>
-            <a:r>
-              <a:rPr sz="1500" b="0" i="0">
-                <a:solidFill>
-                  <a:srgbClr val="333333"/>
-                </a:solidFill>
-                <a:latin typeface="Calibri"/>
-              </a:rPr>
-              <a:t>–   </a:t>
-            </a:r>
-            <a:r>
-              <a:rPr sz="1500" b="1" i="0">
-                <a:solidFill>
-                  <a:srgbClr val="333333"/>
-                </a:solidFill>
-                <a:latin typeface="Calibri"/>
-              </a:rPr>
-              <a:t>Exito:</a:t>
-            </a:r>
-            <a:r>
-              <a:rPr sz="1500" b="0" i="0">
-                <a:solidFill>
-                  <a:srgbClr val="333333"/>
-                </a:solidFill>
-                <a:latin typeface="Calibri"/>
-              </a:rPr>
-              <a:t> Gaps.</a:t>
-            </a:r>
-          </a:p>
-          <a:p>
-            <a:pPr>
-              <a:spcAft>
-                <a:spcPts val="800"/>
-              </a:spcAft>
-            </a:pPr>
-            <a:r>
-              <a:rPr sz="1500" b="0" i="0">
-                <a:solidFill>
-                  <a:srgbClr val="333333"/>
-                </a:solidFill>
-                <a:latin typeface="Calibri"/>
-              </a:rPr>
-              <a:t>–   </a:t>
-            </a:r>
-            <a:r>
-              <a:rPr sz="1500" b="1" i="0">
-                <a:solidFill>
-                  <a:srgbClr val="333333"/>
-                </a:solidFill>
-                <a:latin typeface="Calibri"/>
-              </a:rPr>
-              <a:t>Exito:</a:t>
-            </a:r>
-            <a:r>
-              <a:rPr sz="1500" b="0" i="0">
-                <a:solidFill>
-                  <a:srgbClr val="333333"/>
-                </a:solidFill>
-                <a:latin typeface="Calibri"/>
-              </a:rPr>
-              <a:t> Avance subido si aplica.</a:t>
+              <a:t>–   Demo + gaps con responsable.</a:t>
             </a:r>
           </a:p>
         </p:txBody>
@@ -9666,7 +10412,7 @@
                 </a:solidFill>
                 <a:latin typeface="Calibri"/>
               </a:rPr>
-              <a:t>Taller PI VetCare — escenario / datos de partida</a:t>
+              <a:t>Taller PI VetCare — objetivo y criterios</a:t>
             </a:r>
           </a:p>
         </p:txBody>
@@ -9699,13 +10445,167 @@
               </a:spcAft>
             </a:pPr>
             <a:r>
-              <a:rPr sz="1600" b="0" i="0">
+              <a:rPr sz="1500" b="0" i="0">
                 <a:solidFill>
                   <a:srgbClr val="333333"/>
                 </a:solidFill>
                 <a:latin typeface="Calibri"/>
               </a:rPr>
-              <a:t>–   Evidencias: ER, DDL, roles, procs, fn, triggers, opt.</a:t>
+              <a:t>–   </a:t>
+            </a:r>
+            <a:r>
+              <a:rPr sz="1500" b="1" i="0">
+                <a:solidFill>
+                  <a:srgbClr val="333333"/>
+                </a:solidFill>
+                <a:latin typeface="Calibri"/>
+              </a:rPr>
+              <a:t>Objetivo:</a:t>
+            </a:r>
+            <a:r>
+              <a:rPr sz="1500" b="0" i="0">
+                <a:solidFill>
+                  <a:srgbClr val="333333"/>
+                </a:solidFill>
+                <a:latin typeface="Calibri"/>
+              </a:rPr>
+              <a:t> Checklist avance + demo 3-5 min.</a:t>
+            </a:r>
+          </a:p>
+          <a:p>
+            <a:pPr>
+              <a:spcAft>
+                <a:spcPts val="800"/>
+              </a:spcAft>
+            </a:pPr>
+            <a:r>
+              <a:rPr sz="1500" b="0" i="0">
+                <a:solidFill>
+                  <a:srgbClr val="333333"/>
+                </a:solidFill>
+                <a:latin typeface="Calibri"/>
+              </a:rPr>
+              <a:t>–   </a:t>
+            </a:r>
+            <a:r>
+              <a:rPr sz="1500" b="1" i="0">
+                <a:solidFill>
+                  <a:srgbClr val="333333"/>
+                </a:solidFill>
+                <a:latin typeface="Calibri"/>
+              </a:rPr>
+              <a:t>Exito:</a:t>
+            </a:r>
+            <a:r>
+              <a:rPr sz="1500" b="0" i="0">
+                <a:solidFill>
+                  <a:srgbClr val="333333"/>
+                </a:solidFill>
+                <a:latin typeface="Calibri"/>
+              </a:rPr>
+              <a:t> Checklist evidenciada.</a:t>
+            </a:r>
+          </a:p>
+          <a:p>
+            <a:pPr>
+              <a:spcAft>
+                <a:spcPts val="800"/>
+              </a:spcAft>
+            </a:pPr>
+            <a:r>
+              <a:rPr sz="1500" b="0" i="0">
+                <a:solidFill>
+                  <a:srgbClr val="333333"/>
+                </a:solidFill>
+                <a:latin typeface="Calibri"/>
+              </a:rPr>
+              <a:t>–   </a:t>
+            </a:r>
+            <a:r>
+              <a:rPr sz="1500" b="1" i="0">
+                <a:solidFill>
+                  <a:srgbClr val="333333"/>
+                </a:solidFill>
+                <a:latin typeface="Calibri"/>
+              </a:rPr>
+              <a:t>Exito:</a:t>
+            </a:r>
+            <a:r>
+              <a:rPr sz="1500" b="0" i="0">
+                <a:solidFill>
+                  <a:srgbClr val="333333"/>
+                </a:solidFill>
+                <a:latin typeface="Calibri"/>
+              </a:rPr>
+              <a:t> Demo ER+proc+trigger.</a:t>
+            </a:r>
+          </a:p>
+          <a:p>
+            <a:pPr>
+              <a:spcAft>
+                <a:spcPts val="800"/>
+              </a:spcAft>
+            </a:pPr>
+            <a:r>
+              <a:rPr sz="1500" b="0" i="0">
+                <a:solidFill>
+                  <a:srgbClr val="333333"/>
+                </a:solidFill>
+                <a:latin typeface="Calibri"/>
+              </a:rPr>
+              <a:t>–   </a:t>
+            </a:r>
+            <a:r>
+              <a:rPr sz="1500" b="1" i="0">
+                <a:solidFill>
+                  <a:srgbClr val="333333"/>
+                </a:solidFill>
+                <a:latin typeface="Calibri"/>
+              </a:rPr>
+              <a:t>Exito:</a:t>
+            </a:r>
+            <a:r>
+              <a:rPr sz="1500" b="0" i="0">
+                <a:solidFill>
+                  <a:srgbClr val="333333"/>
+                </a:solidFill>
+                <a:latin typeface="Calibri"/>
+              </a:rPr>
+              <a:t> Gaps.</a:t>
+            </a:r>
+          </a:p>
+          <a:p>
+            <a:pPr>
+              <a:spcAft>
+                <a:spcPts val="800"/>
+              </a:spcAft>
+            </a:pPr>
+            <a:r>
+              <a:rPr sz="1500" b="0" i="0">
+                <a:solidFill>
+                  <a:srgbClr val="333333"/>
+                </a:solidFill>
+                <a:latin typeface="Calibri"/>
+              </a:rPr>
+              <a:t>–   </a:t>
+            </a:r>
+            <a:r>
+              <a:rPr sz="1500" b="1" i="0">
+                <a:solidFill>
+                  <a:srgbClr val="333333"/>
+                </a:solidFill>
+                <a:latin typeface="Calibri"/>
+              </a:rPr>
+              <a:t>Exito:</a:t>
+            </a:r>
+            <a:r>
+              <a:rPr sz="1500" b="0" i="0">
+                <a:solidFill>
+                  <a:srgbClr val="333333"/>
+                </a:solidFill>
+                <a:latin typeface="Calibri"/>
+              </a:rPr>
+              <a:t> Avance subido si aplica.</a:t>
             </a:r>
           </a:p>
         </p:txBody>

--- a/Bases de Datos II/Clases/Clase 11 - Avance del proyecto final/Presentacion.pptx
+++ b/Bases de Datos II/Clases/Clase 11 - Avance del proyecto final/Presentacion.pptx
@@ -5390,7 +5390,23 @@
                 </a:solidFill>
                 <a:latin typeface="Calibri"/>
               </a:rPr>
-              <a:t>–   Evidencia en playground (enlace) o archivo SQL/PNG propio.</a:t>
+              <a:t>–   Evidencia: el SQL y su salida quedan guardados en cada pregunta de ExamLab.</a:t>
+            </a:r>
+          </a:p>
+          <a:p>
+            <a:pPr>
+              <a:spcAft>
+                <a:spcPts val="800"/>
+              </a:spcAft>
+            </a:pPr>
+            <a:r>
+              <a:rPr sz="1600" b="0" i="0">
+                <a:solidFill>
+                  <a:srgbClr val="333333"/>
+                </a:solidFill>
+                <a:latin typeface="Calibri"/>
+              </a:rPr>
+              <a:t>–   Conserva copia en tu carpeta del PI (los .sql que pide el entregable).</a:t>
             </a:r>
           </a:p>
           <a:p>

--- a/Bases de Datos II/Clases/Clase 11 - Avance del proyecto final/Presentacion.pptx
+++ b/Bases de Datos II/Clases/Clase 11 - Avance del proyecto final/Presentacion.pptx
@@ -3653,7 +3653,7 @@
               </a:spcAft>
             </a:pPr>
             <a:r>
-              <a:rPr sz="1600" b="0" i="0">
+              <a:rPr sz="2000" b="0" i="0">
                 <a:solidFill>
                   <a:srgbClr val="333333"/>
                 </a:solidFill>
@@ -5350,7 +5350,7 @@
               </a:spcAft>
             </a:pPr>
             <a:r>
-              <a:rPr sz="1600" b="0" i="0">
+              <a:rPr sz="2000" b="0" i="0">
                 <a:solidFill>
                   <a:srgbClr val="333333"/>
                 </a:solidFill>
@@ -5359,7 +5359,7 @@
               <a:t>–   </a:t>
             </a:r>
             <a:r>
-              <a:rPr sz="1600" b="1" i="0">
+              <a:rPr sz="2000" b="1" i="0">
                 <a:solidFill>
                   <a:srgbClr val="333333"/>
                 </a:solidFill>
@@ -5368,7 +5368,7 @@
               <a:t>Entregable:</a:t>
             </a:r>
             <a:r>
-              <a:rPr sz="1600" b="0" i="0">
+              <a:rPr sz="2000" b="0" i="0">
                 <a:solidFill>
                   <a:srgbClr val="333333"/>
                 </a:solidFill>
@@ -5384,7 +5384,7 @@
               </a:spcAft>
             </a:pPr>
             <a:r>
-              <a:rPr sz="1600" b="0" i="0">
+              <a:rPr sz="2000" b="0" i="0">
                 <a:solidFill>
                   <a:srgbClr val="333333"/>
                 </a:solidFill>
@@ -5400,7 +5400,7 @@
               </a:spcAft>
             </a:pPr>
             <a:r>
-              <a:rPr sz="1600" b="0" i="0">
+              <a:rPr sz="2000" b="0" i="0">
                 <a:solidFill>
                   <a:srgbClr val="333333"/>
                 </a:solidFill>
@@ -5416,7 +5416,7 @@
               </a:spcAft>
             </a:pPr>
             <a:r>
-              <a:rPr sz="1600" b="0" i="0">
+              <a:rPr sz="2000" b="0" i="0">
                 <a:solidFill>
                   <a:srgbClr val="333333"/>
                 </a:solidFill>
@@ -5432,7 +5432,7 @@
               </a:spcAft>
             </a:pPr>
             <a:r>
-              <a:rPr sz="1600" b="0" i="0">
+              <a:rPr sz="2000" b="0" i="0">
                 <a:solidFill>
                   <a:srgbClr val="333333"/>
                 </a:solidFill>
@@ -5441,7 +5441,7 @@
               <a:t>–   </a:t>
             </a:r>
             <a:r>
-              <a:rPr sz="1600" b="1" i="0">
+              <a:rPr sz="2000" b="1" i="0">
                 <a:solidFill>
                   <a:srgbClr val="333333"/>
                 </a:solidFill>
@@ -5450,7 +5450,7 @@
               <a:t>Entrega en ExamLab</a:t>
             </a:r>
             <a:r>
-              <a:rPr sz="1600" b="0" i="0">
+              <a:rPr sz="2000" b="0" i="0">
                 <a:solidFill>
                   <a:srgbClr val="333333"/>
                 </a:solidFill>
@@ -6497,7 +6497,7 @@
               </a:spcAft>
             </a:pPr>
             <a:r>
-              <a:rPr sz="1600" b="0" i="0">
+              <a:rPr sz="2000" b="0" i="0">
                 <a:solidFill>
                   <a:srgbClr val="333333"/>
                 </a:solidFill>
@@ -6506,7 +6506,7 @@
               <a:t>–   </a:t>
             </a:r>
             <a:r>
-              <a:rPr sz="1600" b="1" i="0">
+              <a:rPr sz="2000" b="1" i="0">
                 <a:solidFill>
                   <a:srgbClr val="333333"/>
                 </a:solidFill>
@@ -6515,7 +6515,7 @@
               <a:t>Hoy avanzamos el PI en:</a:t>
             </a:r>
             <a:r>
-              <a:rPr sz="1600" b="0" i="0">
+              <a:rPr sz="2000" b="0" i="0">
                 <a:solidFill>
                   <a:srgbClr val="333333"/>
                 </a:solidFill>
@@ -6531,7 +6531,7 @@
               </a:spcAft>
             </a:pPr>
             <a:r>
-              <a:rPr sz="1600" b="0" i="0">
+              <a:rPr sz="2000" b="0" i="0">
                 <a:solidFill>
                   <a:srgbClr val="333333"/>
                 </a:solidFill>
@@ -6540,7 +6540,7 @@
               <a:t>–   Herramienta: </a:t>
             </a:r>
             <a:r>
-              <a:rPr sz="1600" b="1" i="0">
+              <a:rPr sz="2000" b="1" i="0">
                 <a:solidFill>
                   <a:srgbClr val="333333"/>
                 </a:solidFill>
@@ -6549,7 +6549,7 @@
               <a:t>Live SQL / DB Fiddle + draw.io + ExamLab</a:t>
             </a:r>
             <a:r>
-              <a:rPr sz="1600" b="0" i="0">
+              <a:rPr sz="2000" b="0" i="0">
                 <a:solidFill>
                   <a:srgbClr val="333333"/>
                 </a:solidFill>
@@ -6558,7 +6558,7 @@
               <a:t> · Bloque </a:t>
             </a:r>
             <a:r>
-              <a:rPr sz="1600" b="1" i="0">
+              <a:rPr sz="2000" b="1" i="0">
                 <a:solidFill>
                   <a:srgbClr val="333333"/>
                 </a:solidFill>
@@ -6567,7 +6567,7 @@
               <a:t>120 min</a:t>
             </a:r>
             <a:r>
-              <a:rPr sz="1600" b="0" i="0">
+              <a:rPr sz="2000" b="0" i="0">
                 <a:solidFill>
                   <a:srgbClr val="333333"/>
                 </a:solidFill>
@@ -6583,7 +6583,7 @@
               </a:spcAft>
             </a:pPr>
             <a:r>
-              <a:rPr sz="1600" b="0" i="0">
+              <a:rPr sz="2000" b="0" i="0">
                 <a:solidFill>
                   <a:srgbClr val="333333"/>
                 </a:solidFill>
@@ -6592,7 +6592,7 @@
               <a:t>–   </a:t>
             </a:r>
             <a:r>
-              <a:rPr sz="1600" b="1" i="0">
+              <a:rPr sz="2000" b="1" i="0">
                 <a:solidFill>
                   <a:srgbClr val="333333"/>
                 </a:solidFill>
@@ -6601,7 +6601,7 @@
               <a:t>Entregable de hoy:</a:t>
             </a:r>
             <a:r>
-              <a:rPr sz="1600" b="0" i="0">
+              <a:rPr sz="2000" b="0" i="0">
                 <a:solidFill>
                   <a:srgbClr val="333333"/>
                 </a:solidFill>
@@ -6617,7 +6617,7 @@
               </a:spcAft>
             </a:pPr>
             <a:r>
-              <a:rPr sz="1600" b="0" i="0">
+              <a:rPr sz="2000" b="0" i="0">
                 <a:solidFill>
                   <a:srgbClr val="333333"/>
                 </a:solidFill>
@@ -6633,7 +6633,7 @@
               </a:spcAft>
             </a:pPr>
             <a:r>
-              <a:rPr sz="1600" b="0" i="0">
+              <a:rPr sz="2000" b="0" i="0">
                 <a:solidFill>
                   <a:srgbClr val="333333"/>
                 </a:solidFill>
@@ -6649,7 +6649,7 @@
               </a:spcAft>
             </a:pPr>
             <a:r>
-              <a:rPr sz="1600" b="0" i="0">
+              <a:rPr sz="2000" b="0" i="0">
                 <a:solidFill>
                   <a:srgbClr val="333333"/>
                 </a:solidFill>
@@ -6973,7 +6973,7 @@
         <p:spPr>
           <a:xfrm>
             <a:off x="502920" y="2587752"/>
-            <a:ext cx="2164019" cy="2560320"/>
+            <a:ext cx="2164019" cy="3310128"/>
           </a:xfrm>
           <a:prstGeom prst="rect">
             <a:avLst/>
@@ -7088,7 +7088,7 @@
         <p:spPr>
           <a:xfrm>
             <a:off x="2758379" y="2587752"/>
-            <a:ext cx="2164019" cy="2560320"/>
+            <a:ext cx="2164019" cy="3310128"/>
           </a:xfrm>
           <a:prstGeom prst="rect">
             <a:avLst/>
@@ -7203,7 +7203,7 @@
         <p:spPr>
           <a:xfrm>
             <a:off x="5013838" y="2587752"/>
-            <a:ext cx="2164019" cy="2560320"/>
+            <a:ext cx="2164019" cy="3310128"/>
           </a:xfrm>
           <a:prstGeom prst="rect">
             <a:avLst/>
@@ -7318,7 +7318,7 @@
         <p:spPr>
           <a:xfrm>
             <a:off x="7269297" y="2587752"/>
-            <a:ext cx="2164019" cy="2560320"/>
+            <a:ext cx="2164019" cy="3310128"/>
           </a:xfrm>
           <a:prstGeom prst="rect">
             <a:avLst/>
@@ -7433,7 +7433,7 @@
         <p:spPr>
           <a:xfrm>
             <a:off x="9524756" y="2587752"/>
-            <a:ext cx="2164019" cy="2560320"/>
+            <a:ext cx="2164019" cy="3310128"/>
           </a:xfrm>
           <a:prstGeom prst="rect">
             <a:avLst/>
@@ -7467,8 +7467,8 @@
         </p:nvSpPr>
         <p:spPr>
           <a:xfrm>
-            <a:off x="457200" y="5943600"/>
-            <a:ext cx="11277295" cy="365760"/>
+            <a:off x="457200" y="5806440"/>
+            <a:ext cx="11277295" cy="640080"/>
           </a:xfrm>
           <a:prstGeom prst="rect">
             <a:avLst/>
@@ -7721,7 +7721,7 @@
               </a:spcAft>
             </a:pPr>
             <a:r>
-              <a:rPr sz="1500" b="0" i="0">
+              <a:rPr sz="2000" b="0" i="0">
                 <a:solidFill>
                   <a:srgbClr val="333333"/>
                 </a:solidFill>
@@ -7737,7 +7737,7 @@
               </a:spcAft>
             </a:pPr>
             <a:r>
-              <a:rPr sz="1500" b="0" i="0">
+              <a:rPr sz="2000" b="0" i="0">
                 <a:solidFill>
                   <a:srgbClr val="333333"/>
                 </a:solidFill>
@@ -7753,7 +7753,7 @@
               </a:spcAft>
             </a:pPr>
             <a:r>
-              <a:rPr sz="1500" b="0" i="0">
+              <a:rPr sz="2000" b="0" i="0">
                 <a:solidFill>
                   <a:srgbClr val="333333"/>
                 </a:solidFill>
@@ -7973,7 +7973,7 @@
               </a:spcAft>
             </a:pPr>
             <a:r>
-              <a:rPr sz="1600" b="0" i="0">
+              <a:rPr sz="2000" b="0" i="0">
                 <a:solidFill>
                   <a:srgbClr val="333333"/>
                 </a:solidFill>
@@ -7982,7 +7982,7 @@
               <a:t>–   </a:t>
             </a:r>
             <a:r>
-              <a:rPr sz="1600" b="1" i="0">
+              <a:rPr sz="2000" b="1" i="0">
                 <a:solidFill>
                   <a:srgbClr val="333333"/>
                 </a:solidFill>
@@ -7991,7 +7991,7 @@
               <a:t>Herramienta:</a:t>
             </a:r>
             <a:r>
-              <a:rPr sz="1600" b="0" i="0">
+              <a:rPr sz="2000" b="0" i="0">
                 <a:solidFill>
                   <a:srgbClr val="333333"/>
                 </a:solidFill>
@@ -8007,7 +8007,7 @@
               </a:spcAft>
             </a:pPr>
             <a:r>
-              <a:rPr sz="1600" b="0" i="0">
+              <a:rPr sz="2000" b="0" i="0">
                 <a:solidFill>
                   <a:srgbClr val="333333"/>
                 </a:solidFill>
@@ -8016,7 +8016,7 @@
               <a:t>–   </a:t>
             </a:r>
             <a:r>
-              <a:rPr sz="1600" b="1" i="0">
+              <a:rPr sz="2000" b="1" i="0">
                 <a:solidFill>
                   <a:srgbClr val="333333"/>
                 </a:solidFill>
@@ -8025,7 +8025,7 @@
               <a:t>Demo:</a:t>
             </a:r>
             <a:r>
-              <a:rPr sz="1600" b="0" i="0">
+              <a:rPr sz="2000" b="0" i="0">
                 <a:solidFill>
                   <a:srgbClr val="333333"/>
                 </a:solidFill>
@@ -8041,7 +8041,7 @@
               </a:spcAft>
             </a:pPr>
             <a:r>
-              <a:rPr sz="1600" b="0" i="0">
+              <a:rPr sz="2000" b="0" i="0">
                 <a:solidFill>
                   <a:srgbClr val="333333"/>
                 </a:solidFill>
@@ -8057,7 +8057,7 @@
               </a:spcAft>
             </a:pPr>
             <a:r>
-              <a:rPr sz="1600" b="0" i="0">
+              <a:rPr sz="2000" b="0" i="0">
                 <a:solidFill>
                   <a:srgbClr val="333333"/>
                 </a:solidFill>
@@ -10207,7 +10207,7 @@
               </a:spcAft>
             </a:pPr>
             <a:r>
-              <a:rPr sz="1600" b="0" i="0">
+              <a:rPr sz="2000" b="0" i="0">
                 <a:solidFill>
                   <a:srgbClr val="333333"/>
                 </a:solidFill>
@@ -10216,7 +10216,7 @@
               <a:t>–   </a:t>
             </a:r>
             <a:r>
-              <a:rPr sz="1600" b="1" i="0">
+              <a:rPr sz="2000" b="1" i="0">
                 <a:solidFill>
                   <a:srgbClr val="333333"/>
                 </a:solidFill>
@@ -10225,7 +10225,7 @@
               <a:t>Por qué importa al PI:</a:t>
             </a:r>
             <a:r>
-              <a:rPr sz="1600" b="0" i="0">
+              <a:rPr sz="2000" b="0" i="0">
                 <a:solidFill>
                   <a:srgbClr val="333333"/>
                 </a:solidFill>
@@ -10241,7 +10241,7 @@
               </a:spcAft>
             </a:pPr>
             <a:r>
-              <a:rPr sz="1600" b="0" i="0">
+              <a:rPr sz="2000" b="0" i="0">
                 <a:solidFill>
                   <a:srgbClr val="333333"/>
                 </a:solidFill>
@@ -10461,7 +10461,7 @@
               </a:spcAft>
             </a:pPr>
             <a:r>
-              <a:rPr sz="1500" b="0" i="0">
+              <a:rPr sz="2000" b="0" i="0">
                 <a:solidFill>
                   <a:srgbClr val="333333"/>
                 </a:solidFill>
@@ -10470,7 +10470,7 @@
               <a:t>–   </a:t>
             </a:r>
             <a:r>
-              <a:rPr sz="1500" b="1" i="0">
+              <a:rPr sz="2000" b="1" i="0">
                 <a:solidFill>
                   <a:srgbClr val="333333"/>
                 </a:solidFill>
@@ -10479,7 +10479,7 @@
               <a:t>Objetivo:</a:t>
             </a:r>
             <a:r>
-              <a:rPr sz="1500" b="0" i="0">
+              <a:rPr sz="2000" b="0" i="0">
                 <a:solidFill>
                   <a:srgbClr val="333333"/>
                 </a:solidFill>
@@ -10495,7 +10495,7 @@
               </a:spcAft>
             </a:pPr>
             <a:r>
-              <a:rPr sz="1500" b="0" i="0">
+              <a:rPr sz="2000" b="0" i="0">
                 <a:solidFill>
                   <a:srgbClr val="333333"/>
                 </a:solidFill>
@@ -10504,7 +10504,7 @@
               <a:t>–   </a:t>
             </a:r>
             <a:r>
-              <a:rPr sz="1500" b="1" i="0">
+              <a:rPr sz="2000" b="1" i="0">
                 <a:solidFill>
                   <a:srgbClr val="333333"/>
                 </a:solidFill>
@@ -10513,7 +10513,7 @@
               <a:t>Exito:</a:t>
             </a:r>
             <a:r>
-              <a:rPr sz="1500" b="0" i="0">
+              <a:rPr sz="2000" b="0" i="0">
                 <a:solidFill>
                   <a:srgbClr val="333333"/>
                 </a:solidFill>
@@ -10529,7 +10529,7 @@
               </a:spcAft>
             </a:pPr>
             <a:r>
-              <a:rPr sz="1500" b="0" i="0">
+              <a:rPr sz="2000" b="0" i="0">
                 <a:solidFill>
                   <a:srgbClr val="333333"/>
                 </a:solidFill>
@@ -10538,7 +10538,7 @@
               <a:t>–   </a:t>
             </a:r>
             <a:r>
-              <a:rPr sz="1500" b="1" i="0">
+              <a:rPr sz="2000" b="1" i="0">
                 <a:solidFill>
                   <a:srgbClr val="333333"/>
                 </a:solidFill>
@@ -10547,7 +10547,7 @@
               <a:t>Exito:</a:t>
             </a:r>
             <a:r>
-              <a:rPr sz="1500" b="0" i="0">
+              <a:rPr sz="2000" b="0" i="0">
                 <a:solidFill>
                   <a:srgbClr val="333333"/>
                 </a:solidFill>
@@ -10563,7 +10563,7 @@
               </a:spcAft>
             </a:pPr>
             <a:r>
-              <a:rPr sz="1500" b="0" i="0">
+              <a:rPr sz="2000" b="0" i="0">
                 <a:solidFill>
                   <a:srgbClr val="333333"/>
                 </a:solidFill>
@@ -10572,7 +10572,7 @@
               <a:t>–   </a:t>
             </a:r>
             <a:r>
-              <a:rPr sz="1500" b="1" i="0">
+              <a:rPr sz="2000" b="1" i="0">
                 <a:solidFill>
                   <a:srgbClr val="333333"/>
                 </a:solidFill>
@@ -10581,7 +10581,7 @@
               <a:t>Exito:</a:t>
             </a:r>
             <a:r>
-              <a:rPr sz="1500" b="0" i="0">
+              <a:rPr sz="2000" b="0" i="0">
                 <a:solidFill>
                   <a:srgbClr val="333333"/>
                 </a:solidFill>
@@ -10597,7 +10597,7 @@
               </a:spcAft>
             </a:pPr>
             <a:r>
-              <a:rPr sz="1500" b="0" i="0">
+              <a:rPr sz="2000" b="0" i="0">
                 <a:solidFill>
                   <a:srgbClr val="333333"/>
                 </a:solidFill>
@@ -10606,7 +10606,7 @@
               <a:t>–   </a:t>
             </a:r>
             <a:r>
-              <a:rPr sz="1500" b="1" i="0">
+              <a:rPr sz="2000" b="1" i="0">
                 <a:solidFill>
                   <a:srgbClr val="333333"/>
                 </a:solidFill>
@@ -10615,7 +10615,7 @@
               <a:t>Exito:</a:t>
             </a:r>
             <a:r>
-              <a:rPr sz="1500" b="0" i="0">
+              <a:rPr sz="2000" b="0" i="0">
                 <a:solidFill>
                   <a:srgbClr val="333333"/>
                 </a:solidFill>

--- a/Bases de Datos II/Clases/Clase 11 - Avance del proyecto final/Presentacion.pptx
+++ b/Bases de Datos II/Clases/Clase 11 - Avance del proyecto final/Presentacion.pptx
@@ -4460,7 +4460,7 @@
                 </a:solidFill>
                 <a:latin typeface="Calibri"/>
               </a:rPr>
-              <a:t>Subir avance intermedio a ExamLab (Talleres) si se pide.</a:t>
+              <a:t>Subir avance intermedio a la plataforma del curso (Talleres) si se pide.</a:t>
             </a:r>
           </a:p>
         </p:txBody>
@@ -5390,7 +5390,7 @@
                 </a:solidFill>
                 <a:latin typeface="Calibri"/>
               </a:rPr>
-              <a:t>–   Evidencia: el SQL y su salida quedan guardados en cada pregunta de ExamLab.</a:t>
+              <a:t>–   Evidencia: el SQL y su salida quedan guardados en cada pregunta de la plataforma del curso.</a:t>
             </a:r>
           </a:p>
           <a:p>
@@ -5447,7 +5447,7 @@
                 </a:solidFill>
                 <a:latin typeface="Calibri"/>
               </a:rPr>
-              <a:t>Entrega en ExamLab</a:t>
+              <a:t>Entrega en la plataforma del curso</a:t>
             </a:r>
             <a:r>
               <a:rPr sz="2000" b="0" i="0">
@@ -5456,7 +5456,7 @@
                 </a:solidFill>
                 <a:latin typeface="Calibri"/>
               </a:rPr>
-              <a:t> (https://uniaj.examlab.workers.dev/) — domingo 23:59 cuando aplique taller.</a:t>
+              <a:t> — en la fecha que indique el docente.</a:t>
             </a:r>
           </a:p>
         </p:txBody>
@@ -6051,7 +6051,7 @@
                 </a:solidFill>
                 <a:latin typeface="Calibri"/>
               </a:rPr>
-              <a:t>Taller de la semana en ExamLab (https://uniaj.examlab.workers.dev/): domingo 23:59 (regla del Acuerdo) cuando aplique.</a:t>
+              <a:t>Si el docente asigna taller esta semana, él indica el canal y la fecha.</a:t>
             </a:r>
           </a:p>
         </p:txBody>
@@ -6546,7 +6546,7 @@
                 </a:solidFill>
                 <a:latin typeface="Calibri"/>
               </a:rPr>
-              <a:t>Live SQL / DB Fiddle + draw.io + ExamLab</a:t>
+              <a:t>Live SQL / DB Fiddle + draw.io + la plataforma del curso</a:t>
             </a:r>
             <a:r>
               <a:rPr sz="2000" b="0" i="0">
@@ -7997,7 +7997,7 @@
                 </a:solidFill>
                 <a:latin typeface="Calibri"/>
               </a:rPr>
-              <a:t> Live SQL / DB Fiddle + draw.io + ExamLab</a:t>
+              <a:t> Live SQL / DB Fiddle + draw.io + la plataforma del curso</a:t>
             </a:r>
           </a:p>
           <a:p>
@@ -9275,7 +9275,7 @@
                 </a:solidFill>
                 <a:latin typeface="Calibri"/>
               </a:rPr>
-              <a:t>Del boceto a ExamLab (diagrama)</a:t>
+              <a:t>Del boceto a la plataforma del curso (diagrama)</a:t>
             </a:r>
           </a:p>
         </p:txBody>
@@ -9309,7 +9309,7 @@
                 </a:solidFill>
                 <a:latin typeface="Calibri"/>
               </a:rPr>
-              <a:t>El diagrama se entrega como codigo Mermaid dentro de ExamLab, no como imagen</a:t>
+              <a:t>El diagrama se entrega como codigo Mermaid dentro de la plataforma del curso, no como imagen</a:t>
             </a:r>
           </a:p>
         </p:txBody>
@@ -9806,7 +9806,7 @@
                 </a:solidFill>
                 <a:latin typeface="Calibri"/>
               </a:rPr>
-              <a:t>Pega y renderiza en ExamLab</a:t>
+              <a:t>Pega y renderiza en la plataforma del curso</a:t>
             </a:r>
           </a:p>
           <a:p>
@@ -9822,7 +9822,7 @@
                 </a:solidFill>
                 <a:latin typeface="Calibri"/>
               </a:rPr>
-              <a:t>Pega ese codigo en la caja de texto de la pregunta y mira como lo dibuja la plataforma. Si no renderiza, corrige ahi mismo: lo que se califica es el diagrama renderizado dentro de ExamLab.</a:t>
+              <a:t>Pega ese codigo en la caja de texto de la pregunta y mira como lo dibuja la plataforma. Si no renderiza, corrige ahi mismo: lo que se califica es el diagrama renderizado dentro de la plataforma del curso.</a:t>
             </a:r>
           </a:p>
         </p:txBody>
